--- a/presentations/SS_L02_MultitaskingFloor_Lesson.pptx
+++ b/presentations/SS_L02_MultitaskingFloor_Lesson.pptx
@@ -2167,7 +2167,7 @@
                 <a:ea typeface="IBM Plex Sans" pitchFamily="34" charset="-122"/>
                 <a:cs typeface="IBM Plex Sans" pitchFamily="34" charset="-120"/>
               </a:rPr>
-              <a:t>Your laptop looks like it runs five programs at once. It does not. One core runs one instruction at a time, and the operating system switches between jobs so fast that your eyes cannot see the joins.</a:t>
+              <a:t>Your computer looks like it runs twenty programs at once. It doesn't. Find out how the operating system shares the processor and the memory, and why every device needs a driver.</a:t>
             </a:r>
             <a:endParaRPr lang="en-US" sz="1800" dirty="0"/>
           </a:p>
@@ -3104,7 +3104,7 @@
                 <a:ea typeface="IBM Plex Sans" pitchFamily="34" charset="-122"/>
                 <a:cs typeface="IBM Plex Sans" pitchFamily="34" charset="-120"/>
               </a:rPr>
-              <a:t>Load these six programs. RAM has 8 blocks.</a:t>
+              <a:t>A machine with 8 blocks of RAM has six programs to run. Load it sensibly, then answer the questions.</a:t>
             </a:r>
             <a:endParaRPr lang="en-US" sz="2200" dirty="0"/>
           </a:p>
@@ -6042,7 +6042,7 @@
         <p:spPr>
           <a:xfrm>
             <a:off x="2889504" y="5468112"/>
-            <a:ext cx="2359152" cy="402336"/>
+            <a:ext cx="1481328" cy="402336"/>
           </a:xfrm>
           <a:prstGeom prst="roundRect">
             <a:avLst>
@@ -6069,7 +6069,7 @@
         <p:spPr>
           <a:xfrm>
             <a:off x="2889504" y="5468112"/>
-            <a:ext cx="2359152" cy="402336"/>
+            <a:ext cx="1481328" cy="402336"/>
           </a:xfrm>
           <a:prstGeom prst="rect">
             <a:avLst/>
@@ -6093,7 +6093,139 @@
                 <a:ea typeface="IBM Plex Sans" pitchFamily="34" charset="-122"/>
                 <a:cs typeface="IBM Plex Sans" pitchFamily="34" charset="-120"/>
               </a:rPr>
-              <a:t>Device driver</a:t>
+              <a:t>Process</a:t>
+            </a:r>
+            <a:endParaRPr lang="en-US" sz="1200" dirty="0"/>
+          </a:p>
+        </p:txBody>
+      </p:sp>
+      <p:sp>
+        <p:nvSpPr>
+          <p:cNvPr id="21" name="Shape 19"/>
+          <p:cNvSpPr/>
+          <p:nvPr/>
+        </p:nvSpPr>
+        <p:spPr>
+          <a:xfrm>
+            <a:off x="4498848" y="5468112"/>
+            <a:ext cx="1920240" cy="402336"/>
+          </a:xfrm>
+          <a:prstGeom prst="roundRect">
+            <a:avLst>
+              <a:gd name="adj" fmla="val 50000"/>
+            </a:avLst>
+          </a:prstGeom>
+          <a:solidFill>
+            <a:srgbClr val="FFFFFF"/>
+          </a:solidFill>
+          <a:ln w="12700">
+            <a:solidFill>
+              <a:srgbClr val="2D63FF"/>
+            </a:solidFill>
+            <a:prstDash val="solid"/>
+          </a:ln>
+        </p:spPr>
+      </p:sp>
+      <p:sp>
+        <p:nvSpPr>
+          <p:cNvPr id="22" name="Text 20"/>
+          <p:cNvSpPr txBox="1"/>
+          <p:nvPr/>
+        </p:nvSpPr>
+        <p:spPr>
+          <a:xfrm>
+            <a:off x="4498848" y="5468112"/>
+            <a:ext cx="1920240" cy="402336"/>
+          </a:xfrm>
+          <a:prstGeom prst="rect">
+            <a:avLst/>
+          </a:prstGeom>
+          <a:noFill/>
+          <a:ln/>
+        </p:spPr>
+        <p:txBody>
+          <a:bodyPr wrap="square" lIns="0" tIns="0" rIns="0" bIns="0" rtlCol="0" anchor="ctr"/>
+          <a:lstStyle/>
+          <a:p>
+            <a:pPr algn="ctr" indent="0" marL="0">
+              <a:buNone/>
+            </a:pPr>
+            <a:r>
+              <a:rPr lang="en-US" sz="1200" dirty="0">
+                <a:solidFill>
+                  <a:srgbClr val="2D63FF"/>
+                </a:solidFill>
+                <a:latin typeface="IBM Plex Sans" pitchFamily="34" charset="0"/>
+                <a:ea typeface="IBM Plex Sans" pitchFamily="34" charset="-122"/>
+                <a:cs typeface="IBM Plex Sans" pitchFamily="34" charset="-120"/>
+              </a:rPr>
+              <a:t>Time slice</a:t>
+            </a:r>
+            <a:endParaRPr lang="en-US" sz="1200" dirty="0"/>
+          </a:p>
+        </p:txBody>
+      </p:sp>
+      <p:sp>
+        <p:nvSpPr>
+          <p:cNvPr id="23" name="Shape 21"/>
+          <p:cNvSpPr/>
+          <p:nvPr/>
+        </p:nvSpPr>
+        <p:spPr>
+          <a:xfrm>
+            <a:off x="6547104" y="5468112"/>
+            <a:ext cx="2944368" cy="402336"/>
+          </a:xfrm>
+          <a:prstGeom prst="roundRect">
+            <a:avLst>
+              <a:gd name="adj" fmla="val 50000"/>
+            </a:avLst>
+          </a:prstGeom>
+          <a:solidFill>
+            <a:srgbClr val="FFFFFF"/>
+          </a:solidFill>
+          <a:ln w="12700">
+            <a:solidFill>
+              <a:srgbClr val="2D63FF"/>
+            </a:solidFill>
+            <a:prstDash val="solid"/>
+          </a:ln>
+        </p:spPr>
+      </p:sp>
+      <p:sp>
+        <p:nvSpPr>
+          <p:cNvPr id="24" name="Text 22"/>
+          <p:cNvSpPr txBox="1"/>
+          <p:nvPr/>
+        </p:nvSpPr>
+        <p:spPr>
+          <a:xfrm>
+            <a:off x="6547104" y="5468112"/>
+            <a:ext cx="2944368" cy="402336"/>
+          </a:xfrm>
+          <a:prstGeom prst="rect">
+            <a:avLst/>
+          </a:prstGeom>
+          <a:noFill/>
+          <a:ln/>
+        </p:spPr>
+        <p:txBody>
+          <a:bodyPr wrap="square" lIns="0" tIns="0" rIns="0" bIns="0" rtlCol="0" anchor="ctr"/>
+          <a:lstStyle/>
+          <a:p>
+            <a:pPr algn="ctr" indent="0" marL="0">
+              <a:buNone/>
+            </a:pPr>
+            <a:r>
+              <a:rPr lang="en-US" sz="1200" dirty="0">
+                <a:solidFill>
+                  <a:srgbClr val="2D63FF"/>
+                </a:solidFill>
+                <a:latin typeface="IBM Plex Sans" pitchFamily="34" charset="0"/>
+                <a:ea typeface="IBM Plex Sans" pitchFamily="34" charset="-122"/>
+                <a:cs typeface="IBM Plex Sans" pitchFamily="34" charset="-120"/>
+              </a:rPr>
+              <a:t>Memory management</a:t>
             </a:r>
             <a:endParaRPr lang="en-US" sz="1200" dirty="0"/>
           </a:p>

--- a/presentations/SS_L02_MultitaskingFloor_Lesson.pptx
+++ b/presentations/SS_L02_MultitaskingFloor_Lesson.pptx
@@ -19,9 +19,10 @@
     <p:sldId id="267" r:id="rId13"/>
     <p:sldId id="268" r:id="rId14"/>
     <p:sldId id="269" r:id="rId15"/>
+    <p:sldId id="270" r:id="rId16"/>
   </p:sldIdLst>
   <p:notesMasterIdLst>
-    <p:notesMasterId r:id="rId16"/>
+    <p:notesMasterId r:id="rId17"/>
   </p:notesMasterIdLst>
   <p:sldSz cx="12192000" cy="6858000"/>
   <p:notesSz cx="6858000" cy="12192000"/>
@@ -692,7 +693,13 @@
           <a:p>
             <a:r>
               <a:rPr lang="en-US" dirty="0"/>
-              <a:t>Make them commit to an answer on paper before they tap the star. Guessing first costs them the learning.</a:t>
+              <a:t>The answer is D: Install more RAM.
+Do not say it yet. Every pupil commits first - fingers, whiteboards or a show of hands on each letter in turn - and you count the split before anyone can change their mind.
+IF MOST OF THE CLASS IS RIGHT: say why it is right in one sentence and go straight on to the independent work.
+IF A SIGNIFICANT GROUP IS ON ONE WRONG LETTER: that option is the misconception to teach against before anyone goes on. Go back to station 4, Virtual memory, and work through its example again, aloud, with the class watching, then re-ask this question.
+The course's own response to a wrong answer here: More RAM means less swapping.
+A limitation, stated rather than papered over: one response covers every wrong option; it does not say what to revisit for each one. The course does not record what each separate wrong option means, and this slide does not invent it. Decide your own reteach for each option before the lesson; the options above are the start of it.
+This is a real activity from the experience (ss-l02-s4-c2), so the wording here is the wording a pupil will see.</a:t>
             </a:r>
             <a:endParaRPr lang="en-US" dirty="0"/>
           </a:p>
@@ -780,7 +787,7 @@
           <a:p>
             <a:r>
               <a:rPr lang="en-US" dirty="0"/>
-              <a:t>Use these as a settler, or as something for early finishers to read in the experience.</a:t>
+              <a:t>Make them commit to an answer on paper before they tap the star. Guessing first costs them the learning.</a:t>
             </a:r>
             <a:endParaRPr lang="en-US" dirty="0"/>
           </a:p>
@@ -868,7 +875,7 @@
           <a:p>
             <a:r>
               <a:rPr lang="en-US" dirty="0"/>
-              <a:t>Timed and silent. Mark against the answer sheet, then ask students to record their weakest area.</a:t>
+              <a:t>Use these as a settler, or as something for early finishers to read in the experience.</a:t>
             </a:r>
             <a:endParaRPr lang="en-US" dirty="0"/>
           </a:p>
@@ -956,7 +963,7 @@
           <a:p>
             <a:r>
               <a:rPr lang="en-US" dirty="0"/>
-              <a:t>Students copy their score-screen breakdown onto the worksheet, then rate themselves here.</a:t>
+              <a:t>Timed and silent. Mark against the answer sheet, then ask students to record their weakest area.</a:t>
             </a:r>
             <a:endParaRPr lang="en-US" dirty="0"/>
           </a:p>
@@ -980,6 +987,94 @@
             <a:fld id="{F7021451-1387-4CA6-816F-3879F97B5CBC}" type="slidenum">
               <a:rPr lang="en-US"/>
               <a:t>14</a:t>
+            </a:fld>
+            <a:endParaRPr lang="en-US"/>
+          </a:p>
+        </p:txBody>
+      </p:sp>
+    </p:spTree>
+    <p:extLst>
+      <p:ext uri="{BB962C8B-B14F-4D97-AF65-F5344CB8AC3E}">
+        <p14:creationId xmlns:p14="http://schemas.microsoft.com/office/powerpoint/2010/main" val="1024086991"/>
+      </p:ext>
+    </p:extLst>
+  </p:cSld>
+  <p:clrMapOvr>
+    <a:masterClrMapping/>
+  </p:clrMapOvr>
+</p:notes>
+</file>
+
+<file path=ppt/notesSlides/notesSlide15.xml><?xml version="1.0" encoding="utf-8"?>
+<p:notes xmlns:a="http://schemas.openxmlformats.org/drawingml/2006/main" xmlns:r="http://schemas.openxmlformats.org/officeDocument/2006/relationships" xmlns:p="http://schemas.openxmlformats.org/presentationml/2006/main">
+  <p:cSld>
+    <p:spTree>
+      <p:nvGrpSpPr>
+        <p:cNvPr id="1" name=""/>
+        <p:cNvGrpSpPr/>
+        <p:nvPr/>
+      </p:nvGrpSpPr>
+      <p:grpSpPr>
+        <a:xfrm>
+          <a:off x="0" y="0"/>
+          <a:ext cx="0" cy="0"/>
+          <a:chOff x="0" y="0"/>
+          <a:chExt cx="0" cy="0"/>
+        </a:xfrm>
+      </p:grpSpPr>
+      <p:sp>
+        <p:nvSpPr>
+          <p:cNvPr id="2" name="Slide Image Placeholder 1"/>
+          <p:cNvSpPr>
+            <a:spLocks noGrp="1" noRot="1" noChangeAspect="1"/>
+          </p:cNvSpPr>
+          <p:nvPr>
+            <p:ph type="sldImg"/>
+          </p:nvPr>
+        </p:nvSpPr>
+        <p:spPr/>
+      </p:sp>
+      <p:sp>
+        <p:nvSpPr>
+          <p:cNvPr id="3" name="Notes Placeholder 2"/>
+          <p:cNvSpPr>
+            <a:spLocks noGrp="1"/>
+          </p:cNvSpPr>
+          <p:nvPr>
+            <p:ph type="body" idx="1"/>
+          </p:nvPr>
+        </p:nvSpPr>
+        <p:spPr/>
+        <p:txBody>
+          <a:bodyPr/>
+          <a:lstStyle/>
+          <a:p>
+            <a:r>
+              <a:rPr lang="en-US" dirty="0"/>
+              <a:t>Students copy their score-screen breakdown onto the worksheet, then rate themselves here.</a:t>
+            </a:r>
+            <a:endParaRPr lang="en-US" dirty="0"/>
+          </a:p>
+        </p:txBody>
+      </p:sp>
+      <p:sp>
+        <p:nvSpPr>
+          <p:cNvPr id="4" name="Slide Number Placeholder 3"/>
+          <p:cNvSpPr>
+            <a:spLocks noGrp="1"/>
+          </p:cNvSpPr>
+          <p:nvPr>
+            <p:ph type="sldNum" sz="quarter" idx="10"/>
+          </p:nvPr>
+        </p:nvSpPr>
+        <p:spPr/>
+        <p:txBody>
+          <a:bodyPr/>
+          <a:lstStyle/>
+          <a:p>
+            <a:fld id="{F7021451-1387-4CA6-816F-3879F97B5CBC}" type="slidenum">
+              <a:rPr lang="en-US"/>
+              <a:t>15</a:t>
             </a:fld>
             <a:endParaRPr lang="en-US"/>
           </a:p>
@@ -2949,12 +3044,12 @@
         </p:nvSpPr>
         <p:spPr>
           <a:xfrm>
-            <a:off x="502920" y="438912"/>
-            <a:ext cx="3108960" cy="502920"/>
+            <a:off x="502920" y="457200"/>
+            <a:ext cx="1051560" cy="420624"/>
           </a:xfrm>
           <a:prstGeom prst="roundRect">
             <a:avLst>
-              <a:gd name="adj" fmla="val 18182"/>
+              <a:gd name="adj" fmla="val 21739"/>
             </a:avLst>
           </a:prstGeom>
           <a:solidFill>
@@ -2971,8 +3066,8 @@
         </p:nvSpPr>
         <p:spPr>
           <a:xfrm>
-            <a:off x="502920" y="438912"/>
-            <a:ext cx="3108960" cy="502920"/>
+            <a:off x="502920" y="457200"/>
+            <a:ext cx="1051560" cy="420624"/>
           </a:xfrm>
           <a:prstGeom prst="rect">
             <a:avLst/>
@@ -2988,7 +3083,7 @@
               <a:buNone/>
             </a:pPr>
             <a:r>
-              <a:rPr lang="en-US" sz="1300" b="1" dirty="0">
+              <a:rPr lang="en-US" sz="1200" b="1" dirty="0">
                 <a:solidFill>
                   <a:srgbClr val="101828"/>
                 </a:solidFill>
@@ -2996,9 +3091,9 @@
                 <a:ea typeface="IBM Plex Mono" pitchFamily="34" charset="-122"/>
                 <a:cs typeface="IBM Plex Mono" pitchFamily="34" charset="-120"/>
               </a:rPr>
-              <a:t>★  FINAL CHALLENGE</a:t>
-            </a:r>
-            <a:endParaRPr lang="en-US" sz="1300" dirty="0"/>
+              <a:t>CHECK</a:t>
+            </a:r>
+            <a:endParaRPr lang="en-US" sz="1200" dirty="0"/>
           </a:p>
         </p:txBody>
       </p:sp>
@@ -3010,8 +3105,8 @@
         </p:nvSpPr>
         <p:spPr>
           <a:xfrm>
-            <a:off x="502920" y="1097280"/>
-            <a:ext cx="11155680" cy="731520"/>
+            <a:off x="1737360" y="457200"/>
+            <a:ext cx="9875520" cy="420624"/>
           </a:xfrm>
           <a:prstGeom prst="rect">
             <a:avLst/>
@@ -3027,34 +3122,76 @@
               <a:buNone/>
             </a:pPr>
             <a:r>
-              <a:rPr lang="en-US" sz="3400" b="1" dirty="0">
-                <a:solidFill>
-                  <a:srgbClr val="101828"/>
+              <a:rPr lang="en-US" sz="1500" dirty="0">
+                <a:solidFill>
+                  <a:srgbClr val="667085"/>
                 </a:solidFill>
                 <a:latin typeface="IBM Plex Sans" pitchFamily="34" charset="0"/>
                 <a:ea typeface="IBM Plex Sans" pitchFamily="34" charset="-122"/>
                 <a:cs typeface="IBM Plex Sans" pitchFamily="34" charset="-120"/>
               </a:rPr>
-              <a:t>The busy machine</a:t>
-            </a:r>
-            <a:endParaRPr lang="en-US" sz="3400" dirty="0"/>
-          </a:p>
-        </p:txBody>
-      </p:sp>
-      <p:sp>
-        <p:nvSpPr>
-          <p:cNvPr id="8" name="Shape 6"/>
+              <a:t>Hands down. Everyone commits.</a:t>
+            </a:r>
+            <a:endParaRPr lang="en-US" sz="1500" dirty="0"/>
+          </a:p>
+        </p:txBody>
+      </p:sp>
+      <p:sp>
+        <p:nvSpPr>
+          <p:cNvPr id="8" name="Text 6"/>
+          <p:cNvSpPr txBox="1"/>
+          <p:nvPr/>
+        </p:nvSpPr>
+        <p:spPr>
+          <a:xfrm>
+            <a:off x="502920" y="1097280"/>
+            <a:ext cx="11155680" cy="914400"/>
+          </a:xfrm>
+          <a:prstGeom prst="rect">
+            <a:avLst/>
+          </a:prstGeom>
+          <a:noFill/>
+          <a:ln/>
+        </p:spPr>
+        <p:txBody>
+          <a:bodyPr wrap="square" lIns="0" tIns="0" rIns="0" bIns="0" rtlCol="0" anchor="ctr"/>
+          <a:lstStyle/>
+          <a:p>
+            <a:pPr indent="0" marL="0">
+              <a:lnSpc>
+                <a:spcPct val="115000"/>
+              </a:lnSpc>
+              <a:buNone/>
+            </a:pPr>
+            <a:r>
+              <a:rPr lang="en-US" sz="2600" b="1" dirty="0">
+                <a:solidFill>
+                  <a:srgbClr val="101828"/>
+                </a:solidFill>
+                <a:latin typeface="IBM Plex Sans" pitchFamily="34" charset="0"/>
+                <a:ea typeface="IBM Plex Sans" pitchFamily="34" charset="-122"/>
+                <a:cs typeface="IBM Plex Sans" pitchFamily="34" charset="-120"/>
+              </a:rPr>
+              <a:t>What is the best fix for a computer constantly using virtual memory?</a:t>
+            </a:r>
+            <a:endParaRPr lang="en-US" sz="2600" dirty="0"/>
+          </a:p>
+        </p:txBody>
+      </p:sp>
+      <p:sp>
+        <p:nvSpPr>
+          <p:cNvPr id="9" name="Shape 7"/>
           <p:cNvSpPr/>
           <p:nvPr/>
         </p:nvSpPr>
         <p:spPr>
           <a:xfrm>
-            <a:off x="502920" y="2011680"/>
-            <a:ext cx="11155680" cy="2194560"/>
+            <a:off x="502920" y="2148840"/>
+            <a:ext cx="11155680" cy="731520"/>
           </a:xfrm>
           <a:prstGeom prst="roundRect">
             <a:avLst>
-              <a:gd name="adj" fmla="val 5000"/>
+              <a:gd name="adj" fmla="val 15000"/>
             </a:avLst>
           </a:prstGeom>
           <a:solidFill>
@@ -3062,7 +3199,7 @@
           </a:solidFill>
           <a:ln w="15875">
             <a:solidFill>
-              <a:srgbClr val="2D63FF"/>
+              <a:srgbClr val="D9DEE7"/>
             </a:solidFill>
             <a:prstDash val="solid"/>
           </a:ln>
@@ -3070,14 +3207,75 @@
       </p:sp>
       <p:sp>
         <p:nvSpPr>
-          <p:cNvPr id="9" name="Text 7"/>
-          <p:cNvSpPr txBox="1"/>
-          <p:nvPr/>
-        </p:nvSpPr>
-        <p:spPr>
-          <a:xfrm>
-            <a:off x="1005840" y="2331720"/>
-            <a:ext cx="10149840" cy="1554480"/>
+          <p:cNvPr id="10" name="Shape 8"/>
+          <p:cNvSpPr/>
+          <p:nvPr/>
+        </p:nvSpPr>
+        <p:spPr>
+          <a:xfrm>
+            <a:off x="777240" y="2295144"/>
+            <a:ext cx="438912" cy="438912"/>
+          </a:xfrm>
+          <a:prstGeom prst="roundRect">
+            <a:avLst>
+              <a:gd name="adj" fmla="val 20833"/>
+            </a:avLst>
+          </a:prstGeom>
+          <a:solidFill>
+            <a:srgbClr val="EEF2FB"/>
+          </a:solidFill>
+          <a:ln/>
+        </p:spPr>
+      </p:sp>
+      <p:sp>
+        <p:nvSpPr>
+          <p:cNvPr id="11" name="Text 9"/>
+          <p:cNvSpPr txBox="1"/>
+          <p:nvPr/>
+        </p:nvSpPr>
+        <p:spPr>
+          <a:xfrm>
+            <a:off x="777240" y="2295144"/>
+            <a:ext cx="438912" cy="438912"/>
+          </a:xfrm>
+          <a:prstGeom prst="rect">
+            <a:avLst/>
+          </a:prstGeom>
+          <a:noFill/>
+          <a:ln/>
+        </p:spPr>
+        <p:txBody>
+          <a:bodyPr wrap="square" lIns="0" tIns="0" rIns="0" bIns="0" rtlCol="0" anchor="ctr"/>
+          <a:lstStyle/>
+          <a:p>
+            <a:pPr algn="ctr" indent="0" marL="0">
+              <a:buNone/>
+            </a:pPr>
+            <a:r>
+              <a:rPr lang="en-US" sz="1300" b="1" dirty="0">
+                <a:solidFill>
+                  <a:srgbClr val="2D63FF"/>
+                </a:solidFill>
+                <a:latin typeface="IBM Plex Mono" pitchFamily="34" charset="0"/>
+                <a:ea typeface="IBM Plex Mono" pitchFamily="34" charset="-122"/>
+                <a:cs typeface="IBM Plex Mono" pitchFamily="34" charset="-120"/>
+              </a:rPr>
+              <a:t>A</a:t>
+            </a:r>
+            <a:endParaRPr lang="en-US" sz="1300" dirty="0"/>
+          </a:p>
+        </p:txBody>
+      </p:sp>
+      <p:sp>
+        <p:nvSpPr>
+          <p:cNvPr id="12" name="Text 10"/>
+          <p:cNvSpPr txBox="1"/>
+          <p:nvPr/>
+        </p:nvSpPr>
+        <p:spPr>
+          <a:xfrm>
+            <a:off x="1417320" y="2148840"/>
+            <a:ext cx="10058400" cy="731520"/>
           </a:xfrm>
           <a:prstGeom prst="rect">
             <a:avLst/>
@@ -3091,12 +3289,12 @@
           <a:p>
             <a:pPr indent="0" marL="0">
               <a:lnSpc>
-                <a:spcPct val="130000"/>
+                <a:spcPct val="115000"/>
               </a:lnSpc>
               <a:buNone/>
             </a:pPr>
             <a:r>
-              <a:rPr lang="en-US" sz="2200" dirty="0">
+              <a:rPr lang="en-US" sz="1700" dirty="0">
                 <a:solidFill>
                   <a:srgbClr val="101828"/>
                 </a:solidFill>
@@ -3104,22 +3302,110 @@
                 <a:ea typeface="IBM Plex Sans" pitchFamily="34" charset="-122"/>
                 <a:cs typeface="IBM Plex Sans" pitchFamily="34" charset="-120"/>
               </a:rPr>
-              <a:t>A machine with 8 blocks of RAM has six programs to run. Load it sensibly, then answer the questions.</a:t>
-            </a:r>
-            <a:endParaRPr lang="en-US" sz="2200" dirty="0"/>
-          </a:p>
-        </p:txBody>
-      </p:sp>
-      <p:sp>
-        <p:nvSpPr>
-          <p:cNvPr id="10" name="Text 8"/>
-          <p:cNvSpPr txBox="1"/>
-          <p:nvPr/>
-        </p:nvSpPr>
-        <p:spPr>
-          <a:xfrm>
-            <a:off x="502920" y="4526280"/>
-            <a:ext cx="11155680" cy="457200"/>
+              <a:t>Buy a bigger monitor</a:t>
+            </a:r>
+            <a:endParaRPr lang="en-US" sz="1700" dirty="0"/>
+          </a:p>
+        </p:txBody>
+      </p:sp>
+      <p:sp>
+        <p:nvSpPr>
+          <p:cNvPr id="13" name="Shape 11"/>
+          <p:cNvSpPr/>
+          <p:nvPr/>
+        </p:nvSpPr>
+        <p:spPr>
+          <a:xfrm>
+            <a:off x="502920" y="3017520"/>
+            <a:ext cx="11155680" cy="731520"/>
+          </a:xfrm>
+          <a:prstGeom prst="roundRect">
+            <a:avLst>
+              <a:gd name="adj" fmla="val 15000"/>
+            </a:avLst>
+          </a:prstGeom>
+          <a:solidFill>
+            <a:srgbClr val="FFFFFF"/>
+          </a:solidFill>
+          <a:ln w="15875">
+            <a:solidFill>
+              <a:srgbClr val="D9DEE7"/>
+            </a:solidFill>
+            <a:prstDash val="solid"/>
+          </a:ln>
+        </p:spPr>
+      </p:sp>
+      <p:sp>
+        <p:nvSpPr>
+          <p:cNvPr id="14" name="Shape 12"/>
+          <p:cNvSpPr/>
+          <p:nvPr/>
+        </p:nvSpPr>
+        <p:spPr>
+          <a:xfrm>
+            <a:off x="777240" y="3163824"/>
+            <a:ext cx="438912" cy="438912"/>
+          </a:xfrm>
+          <a:prstGeom prst="roundRect">
+            <a:avLst>
+              <a:gd name="adj" fmla="val 20833"/>
+            </a:avLst>
+          </a:prstGeom>
+          <a:solidFill>
+            <a:srgbClr val="EEF2FB"/>
+          </a:solidFill>
+          <a:ln/>
+        </p:spPr>
+      </p:sp>
+      <p:sp>
+        <p:nvSpPr>
+          <p:cNvPr id="15" name="Text 13"/>
+          <p:cNvSpPr txBox="1"/>
+          <p:nvPr/>
+        </p:nvSpPr>
+        <p:spPr>
+          <a:xfrm>
+            <a:off x="777240" y="3163824"/>
+            <a:ext cx="438912" cy="438912"/>
+          </a:xfrm>
+          <a:prstGeom prst="rect">
+            <a:avLst/>
+          </a:prstGeom>
+          <a:noFill/>
+          <a:ln/>
+        </p:spPr>
+        <p:txBody>
+          <a:bodyPr wrap="square" lIns="0" tIns="0" rIns="0" bIns="0" rtlCol="0" anchor="ctr"/>
+          <a:lstStyle/>
+          <a:p>
+            <a:pPr algn="ctr" indent="0" marL="0">
+              <a:buNone/>
+            </a:pPr>
+            <a:r>
+              <a:rPr lang="en-US" sz="1300" b="1" dirty="0">
+                <a:solidFill>
+                  <a:srgbClr val="2D63FF"/>
+                </a:solidFill>
+                <a:latin typeface="IBM Plex Mono" pitchFamily="34" charset="0"/>
+                <a:ea typeface="IBM Plex Mono" pitchFamily="34" charset="-122"/>
+                <a:cs typeface="IBM Plex Mono" pitchFamily="34" charset="-120"/>
+              </a:rPr>
+              <a:t>B</a:t>
+            </a:r>
+            <a:endParaRPr lang="en-US" sz="1300" dirty="0"/>
+          </a:p>
+        </p:txBody>
+      </p:sp>
+      <p:sp>
+        <p:nvSpPr>
+          <p:cNvPr id="16" name="Text 14"/>
+          <p:cNvSpPr txBox="1"/>
+          <p:nvPr/>
+        </p:nvSpPr>
+        <p:spPr>
+          <a:xfrm>
+            <a:off x="1417320" y="3017520"/>
+            <a:ext cx="10058400" cy="731520"/>
           </a:xfrm>
           <a:prstGeom prst="rect">
             <a:avLst/>
@@ -3132,20 +3418,283 @@
           <a:lstStyle/>
           <a:p>
             <a:pPr indent="0" marL="0">
-              <a:buNone/>
-            </a:pPr>
-            <a:r>
-              <a:rPr lang="en-US" sz="1600" dirty="0">
-                <a:solidFill>
-                  <a:srgbClr val="667085"/>
+              <a:lnSpc>
+                <a:spcPct val="115000"/>
+              </a:lnSpc>
+              <a:buNone/>
+            </a:pPr>
+            <a:r>
+              <a:rPr lang="en-US" sz="1700" dirty="0">
+                <a:solidFill>
+                  <a:srgbClr val="101828"/>
                 </a:solidFill>
                 <a:latin typeface="IBM Plex Sans" pitchFamily="34" charset="0"/>
                 <a:ea typeface="IBM Plex Sans" pitchFamily="34" charset="-122"/>
                 <a:cs typeface="IBM Plex Sans" pitchFamily="34" charset="-120"/>
               </a:rPr>
-              <a:t>Predict on paper first, then look down and test it.</a:t>
-            </a:r>
-            <a:endParaRPr lang="en-US" sz="1600" dirty="0"/>
+              <a:t>Delete the operating system</a:t>
+            </a:r>
+            <a:endParaRPr lang="en-US" sz="1700" dirty="0"/>
+          </a:p>
+        </p:txBody>
+      </p:sp>
+      <p:sp>
+        <p:nvSpPr>
+          <p:cNvPr id="17" name="Shape 15"/>
+          <p:cNvSpPr/>
+          <p:nvPr/>
+        </p:nvSpPr>
+        <p:spPr>
+          <a:xfrm>
+            <a:off x="502920" y="3886200"/>
+            <a:ext cx="11155680" cy="731520"/>
+          </a:xfrm>
+          <a:prstGeom prst="roundRect">
+            <a:avLst>
+              <a:gd name="adj" fmla="val 15000"/>
+            </a:avLst>
+          </a:prstGeom>
+          <a:solidFill>
+            <a:srgbClr val="FFFFFF"/>
+          </a:solidFill>
+          <a:ln w="15875">
+            <a:solidFill>
+              <a:srgbClr val="D9DEE7"/>
+            </a:solidFill>
+            <a:prstDash val="solid"/>
+          </a:ln>
+        </p:spPr>
+      </p:sp>
+      <p:sp>
+        <p:nvSpPr>
+          <p:cNvPr id="18" name="Shape 16"/>
+          <p:cNvSpPr/>
+          <p:nvPr/>
+        </p:nvSpPr>
+        <p:spPr>
+          <a:xfrm>
+            <a:off x="777240" y="4032504"/>
+            <a:ext cx="438912" cy="438912"/>
+          </a:xfrm>
+          <a:prstGeom prst="roundRect">
+            <a:avLst>
+              <a:gd name="adj" fmla="val 20833"/>
+            </a:avLst>
+          </a:prstGeom>
+          <a:solidFill>
+            <a:srgbClr val="EEF2FB"/>
+          </a:solidFill>
+          <a:ln/>
+        </p:spPr>
+      </p:sp>
+      <p:sp>
+        <p:nvSpPr>
+          <p:cNvPr id="19" name="Text 17"/>
+          <p:cNvSpPr txBox="1"/>
+          <p:nvPr/>
+        </p:nvSpPr>
+        <p:spPr>
+          <a:xfrm>
+            <a:off x="777240" y="4032504"/>
+            <a:ext cx="438912" cy="438912"/>
+          </a:xfrm>
+          <a:prstGeom prst="rect">
+            <a:avLst/>
+          </a:prstGeom>
+          <a:noFill/>
+          <a:ln/>
+        </p:spPr>
+        <p:txBody>
+          <a:bodyPr wrap="square" lIns="0" tIns="0" rIns="0" bIns="0" rtlCol="0" anchor="ctr"/>
+          <a:lstStyle/>
+          <a:p>
+            <a:pPr algn="ctr" indent="0" marL="0">
+              <a:buNone/>
+            </a:pPr>
+            <a:r>
+              <a:rPr lang="en-US" sz="1300" b="1" dirty="0">
+                <a:solidFill>
+                  <a:srgbClr val="2D63FF"/>
+                </a:solidFill>
+                <a:latin typeface="IBM Plex Mono" pitchFamily="34" charset="0"/>
+                <a:ea typeface="IBM Plex Mono" pitchFamily="34" charset="-122"/>
+                <a:cs typeface="IBM Plex Mono" pitchFamily="34" charset="-120"/>
+              </a:rPr>
+              <a:t>C</a:t>
+            </a:r>
+            <a:endParaRPr lang="en-US" sz="1300" dirty="0"/>
+          </a:p>
+        </p:txBody>
+      </p:sp>
+      <p:sp>
+        <p:nvSpPr>
+          <p:cNvPr id="20" name="Text 18"/>
+          <p:cNvSpPr txBox="1"/>
+          <p:nvPr/>
+        </p:nvSpPr>
+        <p:spPr>
+          <a:xfrm>
+            <a:off x="1417320" y="3886200"/>
+            <a:ext cx="10058400" cy="731520"/>
+          </a:xfrm>
+          <a:prstGeom prst="rect">
+            <a:avLst/>
+          </a:prstGeom>
+          <a:noFill/>
+          <a:ln/>
+        </p:spPr>
+        <p:txBody>
+          <a:bodyPr wrap="square" lIns="0" tIns="0" rIns="0" bIns="0" rtlCol="0" anchor="ctr"/>
+          <a:lstStyle/>
+          <a:p>
+            <a:pPr indent="0" marL="0">
+              <a:lnSpc>
+                <a:spcPct val="115000"/>
+              </a:lnSpc>
+              <a:buNone/>
+            </a:pPr>
+            <a:r>
+              <a:rPr lang="en-US" sz="1700" dirty="0">
+                <a:solidFill>
+                  <a:srgbClr val="101828"/>
+                </a:solidFill>
+                <a:latin typeface="IBM Plex Sans" pitchFamily="34" charset="0"/>
+                <a:ea typeface="IBM Plex Sans" pitchFamily="34" charset="-122"/>
+                <a:cs typeface="IBM Plex Sans" pitchFamily="34" charset="-120"/>
+              </a:rPr>
+              <a:t>Use a longer cable</a:t>
+            </a:r>
+            <a:endParaRPr lang="en-US" sz="1700" dirty="0"/>
+          </a:p>
+        </p:txBody>
+      </p:sp>
+      <p:sp>
+        <p:nvSpPr>
+          <p:cNvPr id="21" name="Shape 19"/>
+          <p:cNvSpPr/>
+          <p:nvPr/>
+        </p:nvSpPr>
+        <p:spPr>
+          <a:xfrm>
+            <a:off x="502920" y="4754880"/>
+            <a:ext cx="11155680" cy="731520"/>
+          </a:xfrm>
+          <a:prstGeom prst="roundRect">
+            <a:avLst>
+              <a:gd name="adj" fmla="val 15000"/>
+            </a:avLst>
+          </a:prstGeom>
+          <a:solidFill>
+            <a:srgbClr val="FFFFFF"/>
+          </a:solidFill>
+          <a:ln w="15875">
+            <a:solidFill>
+              <a:srgbClr val="D9DEE7"/>
+            </a:solidFill>
+            <a:prstDash val="solid"/>
+          </a:ln>
+        </p:spPr>
+      </p:sp>
+      <p:sp>
+        <p:nvSpPr>
+          <p:cNvPr id="22" name="Shape 20"/>
+          <p:cNvSpPr/>
+          <p:nvPr/>
+        </p:nvSpPr>
+        <p:spPr>
+          <a:xfrm>
+            <a:off x="777240" y="4901184"/>
+            <a:ext cx="438912" cy="438912"/>
+          </a:xfrm>
+          <a:prstGeom prst="roundRect">
+            <a:avLst>
+              <a:gd name="adj" fmla="val 20833"/>
+            </a:avLst>
+          </a:prstGeom>
+          <a:solidFill>
+            <a:srgbClr val="EEF2FB"/>
+          </a:solidFill>
+          <a:ln/>
+        </p:spPr>
+      </p:sp>
+      <p:sp>
+        <p:nvSpPr>
+          <p:cNvPr id="23" name="Text 21"/>
+          <p:cNvSpPr txBox="1"/>
+          <p:nvPr/>
+        </p:nvSpPr>
+        <p:spPr>
+          <a:xfrm>
+            <a:off x="777240" y="4901184"/>
+            <a:ext cx="438912" cy="438912"/>
+          </a:xfrm>
+          <a:prstGeom prst="rect">
+            <a:avLst/>
+          </a:prstGeom>
+          <a:noFill/>
+          <a:ln/>
+        </p:spPr>
+        <p:txBody>
+          <a:bodyPr wrap="square" lIns="0" tIns="0" rIns="0" bIns="0" rtlCol="0" anchor="ctr"/>
+          <a:lstStyle/>
+          <a:p>
+            <a:pPr algn="ctr" indent="0" marL="0">
+              <a:buNone/>
+            </a:pPr>
+            <a:r>
+              <a:rPr lang="en-US" sz="1300" b="1" dirty="0">
+                <a:solidFill>
+                  <a:srgbClr val="2D63FF"/>
+                </a:solidFill>
+                <a:latin typeface="IBM Plex Mono" pitchFamily="34" charset="0"/>
+                <a:ea typeface="IBM Plex Mono" pitchFamily="34" charset="-122"/>
+                <a:cs typeface="IBM Plex Mono" pitchFamily="34" charset="-120"/>
+              </a:rPr>
+              <a:t>D</a:t>
+            </a:r>
+            <a:endParaRPr lang="en-US" sz="1300" dirty="0"/>
+          </a:p>
+        </p:txBody>
+      </p:sp>
+      <p:sp>
+        <p:nvSpPr>
+          <p:cNvPr id="24" name="Text 22"/>
+          <p:cNvSpPr txBox="1"/>
+          <p:nvPr/>
+        </p:nvSpPr>
+        <p:spPr>
+          <a:xfrm>
+            <a:off x="1417320" y="4754880"/>
+            <a:ext cx="10058400" cy="731520"/>
+          </a:xfrm>
+          <a:prstGeom prst="rect">
+            <a:avLst/>
+          </a:prstGeom>
+          <a:noFill/>
+          <a:ln/>
+        </p:spPr>
+        <p:txBody>
+          <a:bodyPr wrap="square" lIns="0" tIns="0" rIns="0" bIns="0" rtlCol="0" anchor="ctr"/>
+          <a:lstStyle/>
+          <a:p>
+            <a:pPr indent="0" marL="0">
+              <a:lnSpc>
+                <a:spcPct val="115000"/>
+              </a:lnSpc>
+              <a:buNone/>
+            </a:pPr>
+            <a:r>
+              <a:rPr lang="en-US" sz="1700" dirty="0">
+                <a:solidFill>
+                  <a:srgbClr val="101828"/>
+                </a:solidFill>
+                <a:latin typeface="IBM Plex Sans" pitchFamily="34" charset="0"/>
+                <a:ea typeface="IBM Plex Sans" pitchFamily="34" charset="-122"/>
+                <a:cs typeface="IBM Plex Sans" pitchFamily="34" charset="-120"/>
+              </a:rPr>
+              <a:t>Install more RAM</a:t>
+            </a:r>
+            <a:endParaRPr lang="en-US" sz="1700" dirty="0"/>
           </a:p>
         </p:txBody>
       </p:sp>
@@ -3281,14 +3830,75 @@
       </p:sp>
       <p:sp>
         <p:nvSpPr>
-          <p:cNvPr id="5" name="Text 3"/>
-          <p:cNvSpPr txBox="1"/>
-          <p:nvPr/>
-        </p:nvSpPr>
-        <p:spPr>
-          <a:xfrm>
-            <a:off x="502920" y="411480"/>
-            <a:ext cx="11155680" cy="777240"/>
+          <p:cNvPr id="5" name="Shape 3"/>
+          <p:cNvSpPr/>
+          <p:nvPr/>
+        </p:nvSpPr>
+        <p:spPr>
+          <a:xfrm>
+            <a:off x="502920" y="438912"/>
+            <a:ext cx="3108960" cy="502920"/>
+          </a:xfrm>
+          <a:prstGeom prst="roundRect">
+            <a:avLst>
+              <a:gd name="adj" fmla="val 18182"/>
+            </a:avLst>
+          </a:prstGeom>
+          <a:solidFill>
+            <a:srgbClr val="F4B942"/>
+          </a:solidFill>
+          <a:ln/>
+        </p:spPr>
+      </p:sp>
+      <p:sp>
+        <p:nvSpPr>
+          <p:cNvPr id="6" name="Text 4"/>
+          <p:cNvSpPr txBox="1"/>
+          <p:nvPr/>
+        </p:nvSpPr>
+        <p:spPr>
+          <a:xfrm>
+            <a:off x="502920" y="438912"/>
+            <a:ext cx="3108960" cy="502920"/>
+          </a:xfrm>
+          <a:prstGeom prst="rect">
+            <a:avLst/>
+          </a:prstGeom>
+          <a:noFill/>
+          <a:ln/>
+        </p:spPr>
+        <p:txBody>
+          <a:bodyPr wrap="square" lIns="0" tIns="0" rIns="0" bIns="0" rtlCol="0" anchor="ctr"/>
+          <a:lstStyle/>
+          <a:p>
+            <a:pPr algn="ctr" indent="0" marL="0">
+              <a:buNone/>
+            </a:pPr>
+            <a:r>
+              <a:rPr lang="en-US" sz="1300" b="1" dirty="0">
+                <a:solidFill>
+                  <a:srgbClr val="101828"/>
+                </a:solidFill>
+                <a:latin typeface="IBM Plex Mono" pitchFamily="34" charset="0"/>
+                <a:ea typeface="IBM Plex Mono" pitchFamily="34" charset="-122"/>
+                <a:cs typeface="IBM Plex Mono" pitchFamily="34" charset="-120"/>
+              </a:rPr>
+              <a:t>★  FINAL CHALLENGE</a:t>
+            </a:r>
+            <a:endParaRPr lang="en-US" sz="1300" dirty="0"/>
+          </a:p>
+        </p:txBody>
+      </p:sp>
+      <p:sp>
+        <p:nvSpPr>
+          <p:cNvPr id="7" name="Text 5"/>
+          <p:cNvSpPr txBox="1"/>
+          <p:nvPr/>
+        </p:nvSpPr>
+        <p:spPr>
+          <a:xfrm>
+            <a:off x="502920" y="1097280"/>
+            <a:ext cx="11155680" cy="731520"/>
           </a:xfrm>
           <a:prstGeom prst="rect">
             <a:avLst/>
@@ -3304,7 +3914,7 @@
               <a:buNone/>
             </a:pPr>
             <a:r>
-              <a:rPr lang="en-US" sz="3200" b="1" dirty="0">
+              <a:rPr lang="en-US" sz="3400" b="1" dirty="0">
                 <a:solidFill>
                   <a:srgbClr val="101828"/>
                 </a:solidFill>
@@ -3312,65 +3922,26 @@
                 <a:ea typeface="IBM Plex Sans" pitchFamily="34" charset="-122"/>
                 <a:cs typeface="IBM Plex Sans" pitchFamily="34" charset="-120"/>
               </a:rPr>
-              <a:t>Worth knowing</a:t>
-            </a:r>
-            <a:endParaRPr lang="en-US" sz="3200" dirty="0"/>
-          </a:p>
-        </p:txBody>
-      </p:sp>
-      <p:sp>
-        <p:nvSpPr>
-          <p:cNvPr id="6" name="Text 4"/>
-          <p:cNvSpPr txBox="1"/>
-          <p:nvPr/>
-        </p:nvSpPr>
-        <p:spPr>
-          <a:xfrm>
-            <a:off x="502920" y="1170432"/>
-            <a:ext cx="11155680" cy="411480"/>
-          </a:xfrm>
-          <a:prstGeom prst="rect">
-            <a:avLst/>
-          </a:prstGeom>
-          <a:noFill/>
-          <a:ln/>
-        </p:spPr>
-        <p:txBody>
-          <a:bodyPr wrap="square" lIns="0" tIns="0" rIns="0" bIns="0" rtlCol="0" anchor="ctr"/>
-          <a:lstStyle/>
-          <a:p>
-            <a:pPr indent="0" marL="0">
-              <a:buNone/>
-            </a:pPr>
-            <a:r>
-              <a:rPr lang="en-US" sz="1500" dirty="0">
-                <a:solidFill>
-                  <a:srgbClr val="667085"/>
-                </a:solidFill>
-                <a:latin typeface="IBM Plex Sans" pitchFamily="34" charset="0"/>
-                <a:ea typeface="IBM Plex Sans" pitchFamily="34" charset="-122"/>
-                <a:cs typeface="IBM Plex Sans" pitchFamily="34" charset="-120"/>
-              </a:rPr>
-              <a:t>The information markers dotted around the room</a:t>
-            </a:r>
-            <a:endParaRPr lang="en-US" sz="1500" dirty="0"/>
-          </a:p>
-        </p:txBody>
-      </p:sp>
-      <p:sp>
-        <p:nvSpPr>
-          <p:cNvPr id="7" name="Shape 5"/>
+              <a:t>The busy machine</a:t>
+            </a:r>
+            <a:endParaRPr lang="en-US" sz="3400" dirty="0"/>
+          </a:p>
+        </p:txBody>
+      </p:sp>
+      <p:sp>
+        <p:nvSpPr>
+          <p:cNvPr id="8" name="Shape 6"/>
           <p:cNvSpPr/>
           <p:nvPr/>
         </p:nvSpPr>
         <p:spPr>
           <a:xfrm>
-            <a:off x="502920" y="1828800"/>
-            <a:ext cx="5394960" cy="1737360"/>
+            <a:off x="502920" y="2011680"/>
+            <a:ext cx="11155680" cy="2194560"/>
           </a:xfrm>
           <a:prstGeom prst="roundRect">
             <a:avLst>
-              <a:gd name="adj" fmla="val 6316"/>
+              <a:gd name="adj" fmla="val 5000"/>
             </a:avLst>
           </a:prstGeom>
           <a:solidFill>
@@ -3386,14 +3957,14 @@
       </p:sp>
       <p:sp>
         <p:nvSpPr>
-          <p:cNvPr id="8" name="Text 6"/>
-          <p:cNvSpPr txBox="1"/>
-          <p:nvPr/>
-        </p:nvSpPr>
-        <p:spPr>
-          <a:xfrm>
-            <a:off x="822960" y="2011680"/>
-            <a:ext cx="4754880" cy="365760"/>
+          <p:cNvPr id="9" name="Text 7"/>
+          <p:cNvSpPr txBox="1"/>
+          <p:nvPr/>
+        </p:nvSpPr>
+        <p:spPr>
+          <a:xfrm>
+            <a:off x="1005840" y="2331720"/>
+            <a:ext cx="10149840" cy="1554480"/>
           </a:xfrm>
           <a:prstGeom prst="rect">
             <a:avLst/>
@@ -3406,52 +3977,52 @@
           <a:lstStyle/>
           <a:p>
             <a:pPr indent="0" marL="0">
-              <a:buNone/>
-            </a:pPr>
-            <a:r>
-              <a:rPr lang="en-US" sz="1600" b="1" dirty="0">
-                <a:solidFill>
-                  <a:srgbClr val="2D63FF"/>
+              <a:lnSpc>
+                <a:spcPct val="130000"/>
+              </a:lnSpc>
+              <a:buNone/>
+            </a:pPr>
+            <a:r>
+              <a:rPr lang="en-US" sz="2200" dirty="0">
+                <a:solidFill>
+                  <a:srgbClr val="101828"/>
                 </a:solidFill>
                 <a:latin typeface="IBM Plex Sans" pitchFamily="34" charset="0"/>
                 <a:ea typeface="IBM Plex Sans" pitchFamily="34" charset="-122"/>
                 <a:cs typeface="IBM Plex Sans" pitchFamily="34" charset="-120"/>
               </a:rPr>
-              <a:t>Milliseconds</a:t>
-            </a:r>
-            <a:endParaRPr lang="en-US" sz="1600" dirty="0"/>
-          </a:p>
-        </p:txBody>
-      </p:sp>
-      <p:sp>
-        <p:nvSpPr>
-          <p:cNvPr id="9" name="Text 7"/>
-          <p:cNvSpPr txBox="1"/>
-          <p:nvPr/>
-        </p:nvSpPr>
-        <p:spPr>
-          <a:xfrm>
-            <a:off x="822960" y="2395728"/>
-            <a:ext cx="4754880" cy="1005840"/>
-          </a:xfrm>
-          <a:prstGeom prst="rect">
-            <a:avLst/>
-          </a:prstGeom>
-          <a:noFill/>
-          <a:ln/>
-        </p:spPr>
-        <p:txBody>
-          <a:bodyPr wrap="square" lIns="0" tIns="0" rIns="0" bIns="0" rtlCol="0" anchor="t"/>
+              <a:t>A machine with 8 blocks of RAM has six programs to run. Load it sensibly, then answer the questions.</a:t>
+            </a:r>
+            <a:endParaRPr lang="en-US" sz="2200" dirty="0"/>
+          </a:p>
+        </p:txBody>
+      </p:sp>
+      <p:sp>
+        <p:nvSpPr>
+          <p:cNvPr id="10" name="Text 8"/>
+          <p:cNvSpPr txBox="1"/>
+          <p:nvPr/>
+        </p:nvSpPr>
+        <p:spPr>
+          <a:xfrm>
+            <a:off x="502920" y="4526280"/>
+            <a:ext cx="11155680" cy="457200"/>
+          </a:xfrm>
+          <a:prstGeom prst="rect">
+            <a:avLst/>
+          </a:prstGeom>
+          <a:noFill/>
+          <a:ln/>
+        </p:spPr>
+        <p:txBody>
+          <a:bodyPr wrap="square" lIns="0" tIns="0" rIns="0" bIns="0" rtlCol="0" anchor="ctr"/>
           <a:lstStyle/>
           <a:p>
             <a:pPr indent="0" marL="0">
-              <a:lnSpc>
-                <a:spcPct val="120000"/>
-              </a:lnSpc>
-              <a:buNone/>
-            </a:pPr>
-            <a:r>
-              <a:rPr lang="en-US" sz="1300" dirty="0">
+              <a:buNone/>
+            </a:pPr>
+            <a:r>
+              <a:rPr lang="en-US" sz="1600" dirty="0">
                 <a:solidFill>
                   <a:srgbClr val="667085"/>
                 </a:solidFill>
@@ -3459,333 +4030,9 @@
                 <a:ea typeface="IBM Plex Sans" pitchFamily="34" charset="-122"/>
                 <a:cs typeface="IBM Plex Sans" pitchFamily="34" charset="-120"/>
               </a:rPr>
-              <a:t>A typical time slice is a few milliseconds. In the time it takes to blink, a processor may have switched between programs a hundred times.</a:t>
-            </a:r>
-            <a:endParaRPr lang="en-US" sz="1300" dirty="0"/>
-          </a:p>
-        </p:txBody>
-      </p:sp>
-      <p:sp>
-        <p:nvSpPr>
-          <p:cNvPr id="10" name="Shape 8"/>
-          <p:cNvSpPr/>
-          <p:nvPr/>
-        </p:nvSpPr>
-        <p:spPr>
-          <a:xfrm>
-            <a:off x="6217920" y="1828800"/>
-            <a:ext cx="5394960" cy="1737360"/>
-          </a:xfrm>
-          <a:prstGeom prst="roundRect">
-            <a:avLst>
-              <a:gd name="adj" fmla="val 6316"/>
-            </a:avLst>
-          </a:prstGeom>
-          <a:solidFill>
-            <a:srgbClr val="FFFFFF"/>
-          </a:solidFill>
-          <a:ln w="15875">
-            <a:solidFill>
-              <a:srgbClr val="08A6A6"/>
-            </a:solidFill>
-            <a:prstDash val="solid"/>
-          </a:ln>
-        </p:spPr>
-      </p:sp>
-      <p:sp>
-        <p:nvSpPr>
-          <p:cNvPr id="11" name="Text 9"/>
-          <p:cNvSpPr txBox="1"/>
-          <p:nvPr/>
-        </p:nvSpPr>
-        <p:spPr>
-          <a:xfrm>
-            <a:off x="6537960" y="2011680"/>
-            <a:ext cx="4754880" cy="365760"/>
-          </a:xfrm>
-          <a:prstGeom prst="rect">
-            <a:avLst/>
-          </a:prstGeom>
-          <a:noFill/>
-          <a:ln/>
-        </p:spPr>
-        <p:txBody>
-          <a:bodyPr wrap="square" lIns="0" tIns="0" rIns="0" bIns="0" rtlCol="0" anchor="ctr"/>
-          <a:lstStyle/>
-          <a:p>
-            <a:pPr indent="0" marL="0">
-              <a:buNone/>
-            </a:pPr>
-            <a:r>
-              <a:rPr lang="en-US" sz="1600" b="1" dirty="0">
-                <a:solidFill>
-                  <a:srgbClr val="08A6A6"/>
-                </a:solidFill>
-                <a:latin typeface="IBM Plex Sans" pitchFamily="34" charset="0"/>
-                <a:ea typeface="IBM Plex Sans" pitchFamily="34" charset="-122"/>
-                <a:cs typeface="IBM Plex Sans" pitchFamily="34" charset="-120"/>
-              </a:rPr>
-              <a:t>Task manager</a:t>
+              <a:t>Predict on paper first, then look down and test it.</a:t>
             </a:r>
             <a:endParaRPr lang="en-US" sz="1600" dirty="0"/>
-          </a:p>
-        </p:txBody>
-      </p:sp>
-      <p:sp>
-        <p:nvSpPr>
-          <p:cNvPr id="12" name="Text 10"/>
-          <p:cNvSpPr txBox="1"/>
-          <p:nvPr/>
-        </p:nvSpPr>
-        <p:spPr>
-          <a:xfrm>
-            <a:off x="6537960" y="2395728"/>
-            <a:ext cx="4754880" cy="1005840"/>
-          </a:xfrm>
-          <a:prstGeom prst="rect">
-            <a:avLst/>
-          </a:prstGeom>
-          <a:noFill/>
-          <a:ln/>
-        </p:spPr>
-        <p:txBody>
-          <a:bodyPr wrap="square" lIns="0" tIns="0" rIns="0" bIns="0" rtlCol="0" anchor="t"/>
-          <a:lstStyle/>
-          <a:p>
-            <a:pPr indent="0" marL="0">
-              <a:lnSpc>
-                <a:spcPct val="120000"/>
-              </a:lnSpc>
-              <a:buNone/>
-            </a:pPr>
-            <a:r>
-              <a:rPr lang="en-US" sz="1300" dirty="0">
-                <a:solidFill>
-                  <a:srgbClr val="667085"/>
-                </a:solidFill>
-                <a:latin typeface="IBM Plex Sans" pitchFamily="34" charset="0"/>
-                <a:ea typeface="IBM Plex Sans" pitchFamily="34" charset="-122"/>
-                <a:cs typeface="IBM Plex Sans" pitchFamily="34" charset="-120"/>
-              </a:rPr>
-              <a:t>Open the task manager on any computer and you'll see dozens of processes running that you never started. Most belong to the operating system.</a:t>
-            </a:r>
-            <a:endParaRPr lang="en-US" sz="1300" dirty="0"/>
-          </a:p>
-        </p:txBody>
-      </p:sp>
-      <p:sp>
-        <p:nvSpPr>
-          <p:cNvPr id="13" name="Shape 11"/>
-          <p:cNvSpPr/>
-          <p:nvPr/>
-        </p:nvSpPr>
-        <p:spPr>
-          <a:xfrm>
-            <a:off x="502920" y="3794760"/>
-            <a:ext cx="5394960" cy="1737360"/>
-          </a:xfrm>
-          <a:prstGeom prst="roundRect">
-            <a:avLst>
-              <a:gd name="adj" fmla="val 6316"/>
-            </a:avLst>
-          </a:prstGeom>
-          <a:solidFill>
-            <a:srgbClr val="FFFFFF"/>
-          </a:solidFill>
-          <a:ln w="15875">
-            <a:solidFill>
-              <a:srgbClr val="2D63FF"/>
-            </a:solidFill>
-            <a:prstDash val="solid"/>
-          </a:ln>
-        </p:spPr>
-      </p:sp>
-      <p:sp>
-        <p:nvSpPr>
-          <p:cNvPr id="14" name="Text 12"/>
-          <p:cNvSpPr txBox="1"/>
-          <p:nvPr/>
-        </p:nvSpPr>
-        <p:spPr>
-          <a:xfrm>
-            <a:off x="822960" y="3977640"/>
-            <a:ext cx="4754880" cy="365760"/>
-          </a:xfrm>
-          <a:prstGeom prst="rect">
-            <a:avLst/>
-          </a:prstGeom>
-          <a:noFill/>
-          <a:ln/>
-        </p:spPr>
-        <p:txBody>
-          <a:bodyPr wrap="square" lIns="0" tIns="0" rIns="0" bIns="0" rtlCol="0" anchor="ctr"/>
-          <a:lstStyle/>
-          <a:p>
-            <a:pPr indent="0" marL="0">
-              <a:buNone/>
-            </a:pPr>
-            <a:r>
-              <a:rPr lang="en-US" sz="1600" b="1" dirty="0">
-                <a:solidFill>
-                  <a:srgbClr val="2D63FF"/>
-                </a:solidFill>
-                <a:latin typeface="IBM Plex Sans" pitchFamily="34" charset="0"/>
-                <a:ea typeface="IBM Plex Sans" pitchFamily="34" charset="-122"/>
-                <a:cs typeface="IBM Plex Sans" pitchFamily="34" charset="-120"/>
-              </a:rPr>
-              <a:t>Thrashing</a:t>
-            </a:r>
-            <a:endParaRPr lang="en-US" sz="1600" dirty="0"/>
-          </a:p>
-        </p:txBody>
-      </p:sp>
-      <p:sp>
-        <p:nvSpPr>
-          <p:cNvPr id="15" name="Text 13"/>
-          <p:cNvSpPr txBox="1"/>
-          <p:nvPr/>
-        </p:nvSpPr>
-        <p:spPr>
-          <a:xfrm>
-            <a:off x="822960" y="4361688"/>
-            <a:ext cx="4754880" cy="1005840"/>
-          </a:xfrm>
-          <a:prstGeom prst="rect">
-            <a:avLst/>
-          </a:prstGeom>
-          <a:noFill/>
-          <a:ln/>
-        </p:spPr>
-        <p:txBody>
-          <a:bodyPr wrap="square" lIns="0" tIns="0" rIns="0" bIns="0" rtlCol="0" anchor="t"/>
-          <a:lstStyle/>
-          <a:p>
-            <a:pPr indent="0" marL="0">
-              <a:lnSpc>
-                <a:spcPct val="120000"/>
-              </a:lnSpc>
-              <a:buNone/>
-            </a:pPr>
-            <a:r>
-              <a:rPr lang="en-US" sz="1300" dirty="0">
-                <a:solidFill>
-                  <a:srgbClr val="667085"/>
-                </a:solidFill>
-                <a:latin typeface="IBM Plex Sans" pitchFamily="34" charset="0"/>
-                <a:ea typeface="IBM Plex Sans" pitchFamily="34" charset="-122"/>
-                <a:cs typeface="IBM Plex Sans" pitchFamily="34" charset="-120"/>
-              </a:rPr>
-              <a:t>If RAM is so full that the OS spends more time swapping than working, it's called thrashing. The disk light stays on and nothing happens.</a:t>
-            </a:r>
-            <a:endParaRPr lang="en-US" sz="1300" dirty="0"/>
-          </a:p>
-        </p:txBody>
-      </p:sp>
-      <p:sp>
-        <p:nvSpPr>
-          <p:cNvPr id="16" name="Shape 14"/>
-          <p:cNvSpPr/>
-          <p:nvPr/>
-        </p:nvSpPr>
-        <p:spPr>
-          <a:xfrm>
-            <a:off x="6217920" y="3794760"/>
-            <a:ext cx="5394960" cy="1737360"/>
-          </a:xfrm>
-          <a:prstGeom prst="roundRect">
-            <a:avLst>
-              <a:gd name="adj" fmla="val 6316"/>
-            </a:avLst>
-          </a:prstGeom>
-          <a:solidFill>
-            <a:srgbClr val="FFFFFF"/>
-          </a:solidFill>
-          <a:ln w="15875">
-            <a:solidFill>
-              <a:srgbClr val="08A6A6"/>
-            </a:solidFill>
-            <a:prstDash val="solid"/>
-          </a:ln>
-        </p:spPr>
-      </p:sp>
-      <p:sp>
-        <p:nvSpPr>
-          <p:cNvPr id="17" name="Text 15"/>
-          <p:cNvSpPr txBox="1"/>
-          <p:nvPr/>
-        </p:nvSpPr>
-        <p:spPr>
-          <a:xfrm>
-            <a:off x="6537960" y="3977640"/>
-            <a:ext cx="4754880" cy="365760"/>
-          </a:xfrm>
-          <a:prstGeom prst="rect">
-            <a:avLst/>
-          </a:prstGeom>
-          <a:noFill/>
-          <a:ln/>
-        </p:spPr>
-        <p:txBody>
-          <a:bodyPr wrap="square" lIns="0" tIns="0" rIns="0" bIns="0" rtlCol="0" anchor="ctr"/>
-          <a:lstStyle/>
-          <a:p>
-            <a:pPr indent="0" marL="0">
-              <a:buNone/>
-            </a:pPr>
-            <a:r>
-              <a:rPr lang="en-US" sz="1600" b="1" dirty="0">
-                <a:solidFill>
-                  <a:srgbClr val="08A6A6"/>
-                </a:solidFill>
-                <a:latin typeface="IBM Plex Sans" pitchFamily="34" charset="0"/>
-                <a:ea typeface="IBM Plex Sans" pitchFamily="34" charset="-122"/>
-                <a:cs typeface="IBM Plex Sans" pitchFamily="34" charset="-120"/>
-              </a:rPr>
-              <a:t>Cores help</a:t>
-            </a:r>
-            <a:endParaRPr lang="en-US" sz="1600" dirty="0"/>
-          </a:p>
-        </p:txBody>
-      </p:sp>
-      <p:sp>
-        <p:nvSpPr>
-          <p:cNvPr id="18" name="Text 16"/>
-          <p:cNvSpPr txBox="1"/>
-          <p:nvPr/>
-        </p:nvSpPr>
-        <p:spPr>
-          <a:xfrm>
-            <a:off x="6537960" y="4361688"/>
-            <a:ext cx="4754880" cy="1005840"/>
-          </a:xfrm>
-          <a:prstGeom prst="rect">
-            <a:avLst/>
-          </a:prstGeom>
-          <a:noFill/>
-          <a:ln/>
-        </p:spPr>
-        <p:txBody>
-          <a:bodyPr wrap="square" lIns="0" tIns="0" rIns="0" bIns="0" rtlCol="0" anchor="t"/>
-          <a:lstStyle/>
-          <a:p>
-            <a:pPr indent="0" marL="0">
-              <a:lnSpc>
-                <a:spcPct val="120000"/>
-              </a:lnSpc>
-              <a:buNone/>
-            </a:pPr>
-            <a:r>
-              <a:rPr lang="en-US" sz="1300" dirty="0">
-                <a:solidFill>
-                  <a:srgbClr val="667085"/>
-                </a:solidFill>
-                <a:latin typeface="IBM Plex Sans" pitchFamily="34" charset="0"/>
-                <a:ea typeface="IBM Plex Sans" pitchFamily="34" charset="-122"/>
-                <a:cs typeface="IBM Plex Sans" pitchFamily="34" charset="-120"/>
-              </a:rPr>
-              <a:t>A four-core processor really can run four things at once, and the OS still time slices on top of that, which is why a modern machine copes with so much.</a:t>
-            </a:r>
-            <a:endParaRPr lang="en-US" sz="1300" dirty="0"/>
           </a:p>
         </p:txBody>
       </p:sp>
@@ -3952,7 +4199,7 @@
                 <a:ea typeface="IBM Plex Sans" pitchFamily="34" charset="-122"/>
                 <a:cs typeface="IBM Plex Sans" pitchFamily="34" charset="-120"/>
               </a:rPr>
-              <a:t>Exam practice</a:t>
+              <a:t>Worth knowing</a:t>
             </a:r>
             <a:endParaRPr lang="en-US" sz="3200" dirty="0"/>
           </a:p>
@@ -3991,7 +4238,7 @@
                 <a:ea typeface="IBM Plex Sans" pitchFamily="34" charset="-122"/>
                 <a:cs typeface="IBM Plex Sans" pitchFamily="34" charset="-120"/>
               </a:rPr>
-              <a:t>Devices away. Answer from memory on the worksheet.</a:t>
+              <a:t>The information markers dotted around the room</a:t>
             </a:r>
             <a:endParaRPr lang="en-US" sz="1500" dirty="0"/>
           </a:p>
@@ -4006,11 +4253,11 @@
         <p:spPr>
           <a:xfrm>
             <a:off x="502920" y="1828800"/>
-            <a:ext cx="11155680" cy="1097280"/>
+            <a:ext cx="5394960" cy="1737360"/>
           </a:xfrm>
           <a:prstGeom prst="roundRect">
             <a:avLst>
-              <a:gd name="adj" fmla="val 10000"/>
+              <a:gd name="adj" fmla="val 6316"/>
             </a:avLst>
           </a:prstGeom>
           <a:solidFill>
@@ -4018,7 +4265,7 @@
           </a:solidFill>
           <a:ln w="15875">
             <a:solidFill>
-              <a:srgbClr val="D9DEE7"/>
+              <a:srgbClr val="2D63FF"/>
             </a:solidFill>
             <a:prstDash val="solid"/>
           </a:ln>
@@ -4032,8 +4279,8 @@
         </p:nvSpPr>
         <p:spPr>
           <a:xfrm>
-            <a:off x="914400" y="1938528"/>
-            <a:ext cx="9418320" cy="877824"/>
+            <a:off x="822960" y="2011680"/>
+            <a:ext cx="4754880" cy="365760"/>
           </a:xfrm>
           <a:prstGeom prst="rect">
             <a:avLst/>
@@ -4046,101 +4293,79 @@
           <a:lstStyle/>
           <a:p>
             <a:pPr indent="0" marL="0">
-              <a:lnSpc>
-                <a:spcPct val="118000"/>
-              </a:lnSpc>
-              <a:buNone/>
-            </a:pPr>
-            <a:r>
-              <a:rPr lang="en-US" sz="1700" dirty="0">
-                <a:solidFill>
-                  <a:srgbClr val="101828"/>
+              <a:buNone/>
+            </a:pPr>
+            <a:r>
+              <a:rPr lang="en-US" sz="1600" b="1" dirty="0">
+                <a:solidFill>
+                  <a:srgbClr val="2D63FF"/>
                 </a:solidFill>
                 <a:latin typeface="IBM Plex Sans" pitchFamily="34" charset="0"/>
                 <a:ea typeface="IBM Plex Sans" pitchFamily="34" charset="-122"/>
                 <a:cs typeface="IBM Plex Sans" pitchFamily="34" charset="-120"/>
               </a:rPr>
-              <a:t>Explain what is meant by multitasking.</a:t>
-            </a:r>
-            <a:endParaRPr lang="en-US" sz="1700" dirty="0"/>
-          </a:p>
-        </p:txBody>
-      </p:sp>
-      <p:sp>
-        <p:nvSpPr>
-          <p:cNvPr id="9" name="Shape 7"/>
+              <a:t>Milliseconds</a:t>
+            </a:r>
+            <a:endParaRPr lang="en-US" sz="1600" dirty="0"/>
+          </a:p>
+        </p:txBody>
+      </p:sp>
+      <p:sp>
+        <p:nvSpPr>
+          <p:cNvPr id="9" name="Text 7"/>
+          <p:cNvSpPr txBox="1"/>
+          <p:nvPr/>
+        </p:nvSpPr>
+        <p:spPr>
+          <a:xfrm>
+            <a:off x="822960" y="2395728"/>
+            <a:ext cx="4754880" cy="1005840"/>
+          </a:xfrm>
+          <a:prstGeom prst="rect">
+            <a:avLst/>
+          </a:prstGeom>
+          <a:noFill/>
+          <a:ln/>
+        </p:spPr>
+        <p:txBody>
+          <a:bodyPr wrap="square" lIns="0" tIns="0" rIns="0" bIns="0" rtlCol="0" anchor="t"/>
+          <a:lstStyle/>
+          <a:p>
+            <a:pPr indent="0" marL="0">
+              <a:lnSpc>
+                <a:spcPct val="120000"/>
+              </a:lnSpc>
+              <a:buNone/>
+            </a:pPr>
+            <a:r>
+              <a:rPr lang="en-US" sz="1300" dirty="0">
+                <a:solidFill>
+                  <a:srgbClr val="667085"/>
+                </a:solidFill>
+                <a:latin typeface="IBM Plex Sans" pitchFamily="34" charset="0"/>
+                <a:ea typeface="IBM Plex Sans" pitchFamily="34" charset="-122"/>
+                <a:cs typeface="IBM Plex Sans" pitchFamily="34" charset="-120"/>
+              </a:rPr>
+              <a:t>A typical time slice is a few milliseconds. In the time it takes to blink, a processor may have switched between programs a hundred times.</a:t>
+            </a:r>
+            <a:endParaRPr lang="en-US" sz="1300" dirty="0"/>
+          </a:p>
+        </p:txBody>
+      </p:sp>
+      <p:sp>
+        <p:nvSpPr>
+          <p:cNvPr id="10" name="Shape 8"/>
           <p:cNvSpPr/>
           <p:nvPr/>
         </p:nvSpPr>
         <p:spPr>
           <a:xfrm>
-            <a:off x="10515600" y="2130552"/>
-            <a:ext cx="868680" cy="493776"/>
+            <a:off x="6217920" y="1828800"/>
+            <a:ext cx="5394960" cy="1737360"/>
           </a:xfrm>
           <a:prstGeom prst="roundRect">
             <a:avLst>
-              <a:gd name="adj" fmla="val 18519"/>
-            </a:avLst>
-          </a:prstGeom>
-          <a:solidFill>
-            <a:srgbClr val="EEF2FB"/>
-          </a:solidFill>
-          <a:ln/>
-        </p:spPr>
-      </p:sp>
-      <p:sp>
-        <p:nvSpPr>
-          <p:cNvPr id="10" name="Text 8"/>
-          <p:cNvSpPr txBox="1"/>
-          <p:nvPr/>
-        </p:nvSpPr>
-        <p:spPr>
-          <a:xfrm>
-            <a:off x="10515600" y="2130552"/>
-            <a:ext cx="868680" cy="493776"/>
-          </a:xfrm>
-          <a:prstGeom prst="rect">
-            <a:avLst/>
-          </a:prstGeom>
-          <a:noFill/>
-          <a:ln/>
-        </p:spPr>
-        <p:txBody>
-          <a:bodyPr wrap="square" lIns="0" tIns="0" rIns="0" bIns="0" rtlCol="0" anchor="ctr"/>
-          <a:lstStyle/>
-          <a:p>
-            <a:pPr algn="ctr" indent="0" marL="0">
-              <a:buNone/>
-            </a:pPr>
-            <a:r>
-              <a:rPr lang="en-US" sz="1500" b="1" dirty="0">
-                <a:solidFill>
-                  <a:srgbClr val="2D63FF"/>
-                </a:solidFill>
-                <a:latin typeface="IBM Plex Mono" pitchFamily="34" charset="0"/>
-                <a:ea typeface="IBM Plex Mono" pitchFamily="34" charset="-122"/>
-                <a:cs typeface="IBM Plex Mono" pitchFamily="34" charset="-120"/>
-              </a:rPr>
-              <a:t>[2]</a:t>
-            </a:r>
-            <a:endParaRPr lang="en-US" sz="1500" dirty="0"/>
-          </a:p>
-        </p:txBody>
-      </p:sp>
-      <p:sp>
-        <p:nvSpPr>
-          <p:cNvPr id="11" name="Shape 9"/>
-          <p:cNvSpPr/>
-          <p:nvPr/>
-        </p:nvSpPr>
-        <p:spPr>
-          <a:xfrm>
-            <a:off x="502920" y="3127248"/>
-            <a:ext cx="11155680" cy="1097280"/>
-          </a:xfrm>
-          <a:prstGeom prst="roundRect">
-            <a:avLst>
-              <a:gd name="adj" fmla="val 10000"/>
+              <a:gd name="adj" fmla="val 6316"/>
             </a:avLst>
           </a:prstGeom>
           <a:solidFill>
@@ -4148,7 +4373,7 @@
           </a:solidFill>
           <a:ln w="15875">
             <a:solidFill>
-              <a:srgbClr val="D9DEE7"/>
+              <a:srgbClr val="08A6A6"/>
             </a:solidFill>
             <a:prstDash val="solid"/>
           </a:ln>
@@ -4156,14 +4381,14 @@
       </p:sp>
       <p:sp>
         <p:nvSpPr>
-          <p:cNvPr id="12" name="Text 10"/>
-          <p:cNvSpPr txBox="1"/>
-          <p:nvPr/>
-        </p:nvSpPr>
-        <p:spPr>
-          <a:xfrm>
-            <a:off x="914400" y="3236976"/>
-            <a:ext cx="9418320" cy="877824"/>
+          <p:cNvPr id="11" name="Text 9"/>
+          <p:cNvSpPr txBox="1"/>
+          <p:nvPr/>
+        </p:nvSpPr>
+        <p:spPr>
+          <a:xfrm>
+            <a:off x="6537960" y="2011680"/>
+            <a:ext cx="4754880" cy="365760"/>
           </a:xfrm>
           <a:prstGeom prst="rect">
             <a:avLst/>
@@ -4176,23 +4401,62 @@
           <a:lstStyle/>
           <a:p>
             <a:pPr indent="0" marL="0">
-              <a:lnSpc>
-                <a:spcPct val="118000"/>
-              </a:lnSpc>
-              <a:buNone/>
-            </a:pPr>
-            <a:r>
-              <a:rPr lang="en-US" sz="1700" dirty="0">
-                <a:solidFill>
-                  <a:srgbClr val="101828"/>
+              <a:buNone/>
+            </a:pPr>
+            <a:r>
+              <a:rPr lang="en-US" sz="1600" b="1" dirty="0">
+                <a:solidFill>
+                  <a:srgbClr val="08A6A6"/>
                 </a:solidFill>
                 <a:latin typeface="IBM Plex Sans" pitchFamily="34" charset="0"/>
                 <a:ea typeface="IBM Plex Sans" pitchFamily="34" charset="-122"/>
                 <a:cs typeface="IBM Plex Sans" pitchFamily="34" charset="-120"/>
               </a:rPr>
-              <a:t>Describe how an operating system manages memory when RAM is full.</a:t>
-            </a:r>
-            <a:endParaRPr lang="en-US" sz="1700" dirty="0"/>
+              <a:t>Task manager</a:t>
+            </a:r>
+            <a:endParaRPr lang="en-US" sz="1600" dirty="0"/>
+          </a:p>
+        </p:txBody>
+      </p:sp>
+      <p:sp>
+        <p:nvSpPr>
+          <p:cNvPr id="12" name="Text 10"/>
+          <p:cNvSpPr txBox="1"/>
+          <p:nvPr/>
+        </p:nvSpPr>
+        <p:spPr>
+          <a:xfrm>
+            <a:off x="6537960" y="2395728"/>
+            <a:ext cx="4754880" cy="1005840"/>
+          </a:xfrm>
+          <a:prstGeom prst="rect">
+            <a:avLst/>
+          </a:prstGeom>
+          <a:noFill/>
+          <a:ln/>
+        </p:spPr>
+        <p:txBody>
+          <a:bodyPr wrap="square" lIns="0" tIns="0" rIns="0" bIns="0" rtlCol="0" anchor="t"/>
+          <a:lstStyle/>
+          <a:p>
+            <a:pPr indent="0" marL="0">
+              <a:lnSpc>
+                <a:spcPct val="120000"/>
+              </a:lnSpc>
+              <a:buNone/>
+            </a:pPr>
+            <a:r>
+              <a:rPr lang="en-US" sz="1300" dirty="0">
+                <a:solidFill>
+                  <a:srgbClr val="667085"/>
+                </a:solidFill>
+                <a:latin typeface="IBM Plex Sans" pitchFamily="34" charset="0"/>
+                <a:ea typeface="IBM Plex Sans" pitchFamily="34" charset="-122"/>
+                <a:cs typeface="IBM Plex Sans" pitchFamily="34" charset="-120"/>
+              </a:rPr>
+              <a:t>Open the task manager on any computer and you'll see dozens of processes running that you never started. Most belong to the operating system.</a:t>
+            </a:r>
+            <a:endParaRPr lang="en-US" sz="1300" dirty="0"/>
           </a:p>
         </p:txBody>
       </p:sp>
@@ -4204,73 +4468,12 @@
         </p:nvSpPr>
         <p:spPr>
           <a:xfrm>
-            <a:off x="10515600" y="3429000"/>
-            <a:ext cx="868680" cy="493776"/>
+            <a:off x="502920" y="3794760"/>
+            <a:ext cx="5394960" cy="1737360"/>
           </a:xfrm>
           <a:prstGeom prst="roundRect">
             <a:avLst>
-              <a:gd name="adj" fmla="val 18519"/>
-            </a:avLst>
-          </a:prstGeom>
-          <a:solidFill>
-            <a:srgbClr val="EEF2FB"/>
-          </a:solidFill>
-          <a:ln/>
-        </p:spPr>
-      </p:sp>
-      <p:sp>
-        <p:nvSpPr>
-          <p:cNvPr id="14" name="Text 12"/>
-          <p:cNvSpPr txBox="1"/>
-          <p:nvPr/>
-        </p:nvSpPr>
-        <p:spPr>
-          <a:xfrm>
-            <a:off x="10515600" y="3429000"/>
-            <a:ext cx="868680" cy="493776"/>
-          </a:xfrm>
-          <a:prstGeom prst="rect">
-            <a:avLst/>
-          </a:prstGeom>
-          <a:noFill/>
-          <a:ln/>
-        </p:spPr>
-        <p:txBody>
-          <a:bodyPr wrap="square" lIns="0" tIns="0" rIns="0" bIns="0" rtlCol="0" anchor="ctr"/>
-          <a:lstStyle/>
-          <a:p>
-            <a:pPr algn="ctr" indent="0" marL="0">
-              <a:buNone/>
-            </a:pPr>
-            <a:r>
-              <a:rPr lang="en-US" sz="1500" b="1" dirty="0">
-                <a:solidFill>
-                  <a:srgbClr val="2D63FF"/>
-                </a:solidFill>
-                <a:latin typeface="IBM Plex Mono" pitchFamily="34" charset="0"/>
-                <a:ea typeface="IBM Plex Mono" pitchFamily="34" charset="-122"/>
-                <a:cs typeface="IBM Plex Mono" pitchFamily="34" charset="-120"/>
-              </a:rPr>
-              <a:t>[4]</a:t>
-            </a:r>
-            <a:endParaRPr lang="en-US" sz="1500" dirty="0"/>
-          </a:p>
-        </p:txBody>
-      </p:sp>
-      <p:sp>
-        <p:nvSpPr>
-          <p:cNvPr id="15" name="Shape 13"/>
-          <p:cNvSpPr/>
-          <p:nvPr/>
-        </p:nvSpPr>
-        <p:spPr>
-          <a:xfrm>
-            <a:off x="502920" y="4425696"/>
-            <a:ext cx="11155680" cy="1097280"/>
-          </a:xfrm>
-          <a:prstGeom prst="roundRect">
-            <a:avLst>
-              <a:gd name="adj" fmla="val 10000"/>
+              <a:gd name="adj" fmla="val 6316"/>
             </a:avLst>
           </a:prstGeom>
           <a:solidFill>
@@ -4278,7 +4481,7 @@
           </a:solidFill>
           <a:ln w="15875">
             <a:solidFill>
-              <a:srgbClr val="D9DEE7"/>
+              <a:srgbClr val="2D63FF"/>
             </a:solidFill>
             <a:prstDash val="solid"/>
           </a:ln>
@@ -4286,14 +4489,14 @@
       </p:sp>
       <p:sp>
         <p:nvSpPr>
-          <p:cNvPr id="16" name="Text 14"/>
-          <p:cNvSpPr txBox="1"/>
-          <p:nvPr/>
-        </p:nvSpPr>
-        <p:spPr>
-          <a:xfrm>
-            <a:off x="914400" y="4535424"/>
-            <a:ext cx="9418320" cy="877824"/>
+          <p:cNvPr id="14" name="Text 12"/>
+          <p:cNvSpPr txBox="1"/>
+          <p:nvPr/>
+        </p:nvSpPr>
+        <p:spPr>
+          <a:xfrm>
+            <a:off x="822960" y="3977640"/>
+            <a:ext cx="4754880" cy="365760"/>
           </a:xfrm>
           <a:prstGeom prst="rect">
             <a:avLst/>
@@ -4306,47 +4509,130 @@
           <a:lstStyle/>
           <a:p>
             <a:pPr indent="0" marL="0">
-              <a:lnSpc>
-                <a:spcPct val="118000"/>
-              </a:lnSpc>
-              <a:buNone/>
-            </a:pPr>
-            <a:r>
-              <a:rPr lang="en-US" sz="1700" dirty="0">
-                <a:solidFill>
-                  <a:srgbClr val="101828"/>
+              <a:buNone/>
+            </a:pPr>
+            <a:r>
+              <a:rPr lang="en-US" sz="1600" b="1" dirty="0">
+                <a:solidFill>
+                  <a:srgbClr val="2D63FF"/>
                 </a:solidFill>
                 <a:latin typeface="IBM Plex Sans" pitchFamily="34" charset="0"/>
                 <a:ea typeface="IBM Plex Sans" pitchFamily="34" charset="-122"/>
                 <a:cs typeface="IBM Plex Sans" pitchFamily="34" charset="-120"/>
               </a:rPr>
-              <a:t>Explain why a computer needs device drivers.</a:t>
-            </a:r>
-            <a:endParaRPr lang="en-US" sz="1700" dirty="0"/>
-          </a:p>
-        </p:txBody>
-      </p:sp>
-      <p:sp>
-        <p:nvSpPr>
-          <p:cNvPr id="17" name="Shape 15"/>
+              <a:t>Thrashing</a:t>
+            </a:r>
+            <a:endParaRPr lang="en-US" sz="1600" dirty="0"/>
+          </a:p>
+        </p:txBody>
+      </p:sp>
+      <p:sp>
+        <p:nvSpPr>
+          <p:cNvPr id="15" name="Text 13"/>
+          <p:cNvSpPr txBox="1"/>
+          <p:nvPr/>
+        </p:nvSpPr>
+        <p:spPr>
+          <a:xfrm>
+            <a:off x="822960" y="4361688"/>
+            <a:ext cx="4754880" cy="1005840"/>
+          </a:xfrm>
+          <a:prstGeom prst="rect">
+            <a:avLst/>
+          </a:prstGeom>
+          <a:noFill/>
+          <a:ln/>
+        </p:spPr>
+        <p:txBody>
+          <a:bodyPr wrap="square" lIns="0" tIns="0" rIns="0" bIns="0" rtlCol="0" anchor="t"/>
+          <a:lstStyle/>
+          <a:p>
+            <a:pPr indent="0" marL="0">
+              <a:lnSpc>
+                <a:spcPct val="120000"/>
+              </a:lnSpc>
+              <a:buNone/>
+            </a:pPr>
+            <a:r>
+              <a:rPr lang="en-US" sz="1300" dirty="0">
+                <a:solidFill>
+                  <a:srgbClr val="667085"/>
+                </a:solidFill>
+                <a:latin typeface="IBM Plex Sans" pitchFamily="34" charset="0"/>
+                <a:ea typeface="IBM Plex Sans" pitchFamily="34" charset="-122"/>
+                <a:cs typeface="IBM Plex Sans" pitchFamily="34" charset="-120"/>
+              </a:rPr>
+              <a:t>If RAM is so full that the OS spends more time swapping than working, it's called thrashing. The disk light stays on and nothing happens.</a:t>
+            </a:r>
+            <a:endParaRPr lang="en-US" sz="1300" dirty="0"/>
+          </a:p>
+        </p:txBody>
+      </p:sp>
+      <p:sp>
+        <p:nvSpPr>
+          <p:cNvPr id="16" name="Shape 14"/>
           <p:cNvSpPr/>
           <p:nvPr/>
         </p:nvSpPr>
         <p:spPr>
           <a:xfrm>
-            <a:off x="10515600" y="4727448"/>
-            <a:ext cx="868680" cy="493776"/>
+            <a:off x="6217920" y="3794760"/>
+            <a:ext cx="5394960" cy="1737360"/>
           </a:xfrm>
           <a:prstGeom prst="roundRect">
             <a:avLst>
-              <a:gd name="adj" fmla="val 18519"/>
+              <a:gd name="adj" fmla="val 6316"/>
             </a:avLst>
           </a:prstGeom>
           <a:solidFill>
-            <a:srgbClr val="EEF2FB"/>
+            <a:srgbClr val="FFFFFF"/>
           </a:solidFill>
-          <a:ln/>
-        </p:spPr>
+          <a:ln w="15875">
+            <a:solidFill>
+              <a:srgbClr val="08A6A6"/>
+            </a:solidFill>
+            <a:prstDash val="solid"/>
+          </a:ln>
+        </p:spPr>
+      </p:sp>
+      <p:sp>
+        <p:nvSpPr>
+          <p:cNvPr id="17" name="Text 15"/>
+          <p:cNvSpPr txBox="1"/>
+          <p:nvPr/>
+        </p:nvSpPr>
+        <p:spPr>
+          <a:xfrm>
+            <a:off x="6537960" y="3977640"/>
+            <a:ext cx="4754880" cy="365760"/>
+          </a:xfrm>
+          <a:prstGeom prst="rect">
+            <a:avLst/>
+          </a:prstGeom>
+          <a:noFill/>
+          <a:ln/>
+        </p:spPr>
+        <p:txBody>
+          <a:bodyPr wrap="square" lIns="0" tIns="0" rIns="0" bIns="0" rtlCol="0" anchor="ctr"/>
+          <a:lstStyle/>
+          <a:p>
+            <a:pPr indent="0" marL="0">
+              <a:buNone/>
+            </a:pPr>
+            <a:r>
+              <a:rPr lang="en-US" sz="1600" b="1" dirty="0">
+                <a:solidFill>
+                  <a:srgbClr val="08A6A6"/>
+                </a:solidFill>
+                <a:latin typeface="IBM Plex Sans" pitchFamily="34" charset="0"/>
+                <a:ea typeface="IBM Plex Sans" pitchFamily="34" charset="-122"/>
+                <a:cs typeface="IBM Plex Sans" pitchFamily="34" charset="-120"/>
+              </a:rPr>
+              <a:t>Cores help</a:t>
+            </a:r>
+            <a:endParaRPr lang="en-US" sz="1600" dirty="0"/>
+          </a:p>
+        </p:txBody>
       </p:sp>
       <p:sp>
         <p:nvSpPr>
@@ -4356,34 +4642,37 @@
         </p:nvSpPr>
         <p:spPr>
           <a:xfrm>
-            <a:off x="10515600" y="4727448"/>
-            <a:ext cx="868680" cy="493776"/>
-          </a:xfrm>
-          <a:prstGeom prst="rect">
-            <a:avLst/>
-          </a:prstGeom>
-          <a:noFill/>
-          <a:ln/>
-        </p:spPr>
-        <p:txBody>
-          <a:bodyPr wrap="square" lIns="0" tIns="0" rIns="0" bIns="0" rtlCol="0" anchor="ctr"/>
-          <a:lstStyle/>
-          <a:p>
-            <a:pPr algn="ctr" indent="0" marL="0">
-              <a:buNone/>
-            </a:pPr>
-            <a:r>
-              <a:rPr lang="en-US" sz="1500" b="1" dirty="0">
-                <a:solidFill>
-                  <a:srgbClr val="2D63FF"/>
-                </a:solidFill>
-                <a:latin typeface="IBM Plex Mono" pitchFamily="34" charset="0"/>
-                <a:ea typeface="IBM Plex Mono" pitchFamily="34" charset="-122"/>
-                <a:cs typeface="IBM Plex Mono" pitchFamily="34" charset="-120"/>
-              </a:rPr>
-              <a:t>[3]</a:t>
-            </a:r>
-            <a:endParaRPr lang="en-US" sz="1500" dirty="0"/>
+            <a:off x="6537960" y="4361688"/>
+            <a:ext cx="4754880" cy="1005840"/>
+          </a:xfrm>
+          <a:prstGeom prst="rect">
+            <a:avLst/>
+          </a:prstGeom>
+          <a:noFill/>
+          <a:ln/>
+        </p:spPr>
+        <p:txBody>
+          <a:bodyPr wrap="square" lIns="0" tIns="0" rIns="0" bIns="0" rtlCol="0" anchor="t"/>
+          <a:lstStyle/>
+          <a:p>
+            <a:pPr indent="0" marL="0">
+              <a:lnSpc>
+                <a:spcPct val="120000"/>
+              </a:lnSpc>
+              <a:buNone/>
+            </a:pPr>
+            <a:r>
+              <a:rPr lang="en-US" sz="1300" dirty="0">
+                <a:solidFill>
+                  <a:srgbClr val="667085"/>
+                </a:solidFill>
+                <a:latin typeface="IBM Plex Sans" pitchFamily="34" charset="0"/>
+                <a:ea typeface="IBM Plex Sans" pitchFamily="34" charset="-122"/>
+                <a:cs typeface="IBM Plex Sans" pitchFamily="34" charset="-120"/>
+              </a:rPr>
+              <a:t>A four-core processor really can run four things at once, and the OS still time slices on top of that, which is why a modern machine copes with so much.</a:t>
+            </a:r>
+            <a:endParaRPr lang="en-US" sz="1300" dirty="0"/>
           </a:p>
         </p:txBody>
       </p:sp>
@@ -4398,6 +4687,604 @@
 <file path=ppt/slides/slide14.xml><?xml version="1.0" encoding="utf-8"?>
 <p:sld xmlns:a="http://schemas.openxmlformats.org/drawingml/2006/main" xmlns:r="http://schemas.openxmlformats.org/officeDocument/2006/relationships" xmlns:p="http://schemas.openxmlformats.org/presentationml/2006/main">
   <p:cSld name="Slide 14">
+    <p:bg>
+      <p:bgPr>
+        <a:solidFill>
+          <a:srgbClr val="F7F7F4"/>
+        </a:solidFill>
+      </p:bgPr>
+    </p:bg>
+    <p:spTree>
+      <p:nvGrpSpPr>
+        <p:cNvPr id="1" name=""/>
+        <p:cNvGrpSpPr/>
+        <p:nvPr/>
+      </p:nvGrpSpPr>
+      <p:grpSpPr>
+        <a:xfrm>
+          <a:off x="0" y="0"/>
+          <a:ext cx="0" cy="0"/>
+          <a:chOff x="0" y="0"/>
+          <a:chExt cx="0" cy="0"/>
+        </a:xfrm>
+      </p:grpSpPr>
+      <p:sp>
+        <p:nvSpPr>
+          <p:cNvPr id="2" name="Shape 0"/>
+          <p:cNvSpPr/>
+          <p:nvPr/>
+        </p:nvSpPr>
+        <p:spPr>
+          <a:xfrm>
+            <a:off x="0" y="0"/>
+            <a:ext cx="12188952" cy="82296"/>
+          </a:xfrm>
+          <a:prstGeom prst="rect">
+            <a:avLst/>
+          </a:prstGeom>
+          <a:solidFill>
+            <a:srgbClr val="2D63FF"/>
+          </a:solidFill>
+          <a:ln/>
+        </p:spPr>
+      </p:sp>
+      <p:sp>
+        <p:nvSpPr>
+          <p:cNvPr id="3" name="Text 1"/>
+          <p:cNvSpPr txBox="1"/>
+          <p:nvPr/>
+        </p:nvSpPr>
+        <p:spPr>
+          <a:xfrm>
+            <a:off x="502920" y="6236208"/>
+            <a:ext cx="7772400" cy="365760"/>
+          </a:xfrm>
+          <a:prstGeom prst="rect">
+            <a:avLst/>
+          </a:prstGeom>
+          <a:noFill/>
+          <a:ln/>
+        </p:spPr>
+        <p:txBody>
+          <a:bodyPr wrap="square" lIns="0" tIns="0" rIns="0" bIns="0" rtlCol="0" anchor="ctr"/>
+          <a:lstStyle/>
+          <a:p>
+            <a:pPr indent="0" marL="0">
+              <a:buNone/>
+            </a:pPr>
+            <a:r>
+              <a:rPr lang="en-US" sz="1100" dirty="0">
+                <a:solidFill>
+                  <a:srgbClr val="667085"/>
+                </a:solidFill>
+                <a:latin typeface="IBM Plex Mono" pitchFamily="34" charset="0"/>
+                <a:ea typeface="IBM Plex Mono" pitchFamily="34" charset="-122"/>
+                <a:cs typeface="IBM Plex Mono" pitchFamily="34" charset="-120"/>
+              </a:rPr>
+              <a:t>1.5 Systems software  |  Lesson 2</a:t>
+            </a:r>
+            <a:endParaRPr lang="en-US" sz="1100" dirty="0"/>
+          </a:p>
+        </p:txBody>
+      </p:sp>
+      <p:sp>
+        <p:nvSpPr>
+          <p:cNvPr id="4" name="Text 2"/>
+          <p:cNvSpPr txBox="1"/>
+          <p:nvPr/>
+        </p:nvSpPr>
+        <p:spPr>
+          <a:xfrm>
+            <a:off x="9326880" y="6236208"/>
+            <a:ext cx="2377440" cy="365760"/>
+          </a:xfrm>
+          <a:prstGeom prst="rect">
+            <a:avLst/>
+          </a:prstGeom>
+          <a:noFill/>
+          <a:ln/>
+        </p:spPr>
+        <p:txBody>
+          <a:bodyPr wrap="square" lIns="0" tIns="0" rIns="0" bIns="0" rtlCol="0" anchor="ctr"/>
+          <a:lstStyle/>
+          <a:p>
+            <a:pPr algn="r" indent="0" marL="0">
+              <a:buNone/>
+            </a:pPr>
+            <a:r>
+              <a:rPr lang="en-US" sz="1100" dirty="0">
+                <a:solidFill>
+                  <a:srgbClr val="667085"/>
+                </a:solidFill>
+                <a:latin typeface="IBM Plex Mono" pitchFamily="34" charset="0"/>
+                <a:ea typeface="IBM Plex Mono" pitchFamily="34" charset="-122"/>
+                <a:cs typeface="IBM Plex Mono" pitchFamily="34" charset="-120"/>
+              </a:rPr>
+              <a:t>Revise 360</a:t>
+            </a:r>
+            <a:endParaRPr lang="en-US" sz="1100" dirty="0"/>
+          </a:p>
+        </p:txBody>
+      </p:sp>
+      <p:sp>
+        <p:nvSpPr>
+          <p:cNvPr id="5" name="Text 3"/>
+          <p:cNvSpPr txBox="1"/>
+          <p:nvPr/>
+        </p:nvSpPr>
+        <p:spPr>
+          <a:xfrm>
+            <a:off x="502920" y="411480"/>
+            <a:ext cx="11155680" cy="777240"/>
+          </a:xfrm>
+          <a:prstGeom prst="rect">
+            <a:avLst/>
+          </a:prstGeom>
+          <a:noFill/>
+          <a:ln/>
+        </p:spPr>
+        <p:txBody>
+          <a:bodyPr wrap="square" lIns="0" tIns="0" rIns="0" bIns="0" rtlCol="0" anchor="ctr"/>
+          <a:lstStyle/>
+          <a:p>
+            <a:pPr indent="0" marL="0">
+              <a:buNone/>
+            </a:pPr>
+            <a:r>
+              <a:rPr lang="en-US" sz="3200" b="1" dirty="0">
+                <a:solidFill>
+                  <a:srgbClr val="101828"/>
+                </a:solidFill>
+                <a:latin typeface="IBM Plex Sans" pitchFamily="34" charset="0"/>
+                <a:ea typeface="IBM Plex Sans" pitchFamily="34" charset="-122"/>
+                <a:cs typeface="IBM Plex Sans" pitchFamily="34" charset="-120"/>
+              </a:rPr>
+              <a:t>Exam practice</a:t>
+            </a:r>
+            <a:endParaRPr lang="en-US" sz="3200" dirty="0"/>
+          </a:p>
+        </p:txBody>
+      </p:sp>
+      <p:sp>
+        <p:nvSpPr>
+          <p:cNvPr id="6" name="Text 4"/>
+          <p:cNvSpPr txBox="1"/>
+          <p:nvPr/>
+        </p:nvSpPr>
+        <p:spPr>
+          <a:xfrm>
+            <a:off x="502920" y="1170432"/>
+            <a:ext cx="11155680" cy="411480"/>
+          </a:xfrm>
+          <a:prstGeom prst="rect">
+            <a:avLst/>
+          </a:prstGeom>
+          <a:noFill/>
+          <a:ln/>
+        </p:spPr>
+        <p:txBody>
+          <a:bodyPr wrap="square" lIns="0" tIns="0" rIns="0" bIns="0" rtlCol="0" anchor="ctr"/>
+          <a:lstStyle/>
+          <a:p>
+            <a:pPr indent="0" marL="0">
+              <a:buNone/>
+            </a:pPr>
+            <a:r>
+              <a:rPr lang="en-US" sz="1500" dirty="0">
+                <a:solidFill>
+                  <a:srgbClr val="667085"/>
+                </a:solidFill>
+                <a:latin typeface="IBM Plex Sans" pitchFamily="34" charset="0"/>
+                <a:ea typeface="IBM Plex Sans" pitchFamily="34" charset="-122"/>
+                <a:cs typeface="IBM Plex Sans" pitchFamily="34" charset="-120"/>
+              </a:rPr>
+              <a:t>Devices away. Answer from memory on the worksheet.</a:t>
+            </a:r>
+            <a:endParaRPr lang="en-US" sz="1500" dirty="0"/>
+          </a:p>
+        </p:txBody>
+      </p:sp>
+      <p:sp>
+        <p:nvSpPr>
+          <p:cNvPr id="7" name="Shape 5"/>
+          <p:cNvSpPr/>
+          <p:nvPr/>
+        </p:nvSpPr>
+        <p:spPr>
+          <a:xfrm>
+            <a:off x="502920" y="1828800"/>
+            <a:ext cx="11155680" cy="1097280"/>
+          </a:xfrm>
+          <a:prstGeom prst="roundRect">
+            <a:avLst>
+              <a:gd name="adj" fmla="val 10000"/>
+            </a:avLst>
+          </a:prstGeom>
+          <a:solidFill>
+            <a:srgbClr val="FFFFFF"/>
+          </a:solidFill>
+          <a:ln w="15875">
+            <a:solidFill>
+              <a:srgbClr val="D9DEE7"/>
+            </a:solidFill>
+            <a:prstDash val="solid"/>
+          </a:ln>
+        </p:spPr>
+      </p:sp>
+      <p:sp>
+        <p:nvSpPr>
+          <p:cNvPr id="8" name="Text 6"/>
+          <p:cNvSpPr txBox="1"/>
+          <p:nvPr/>
+        </p:nvSpPr>
+        <p:spPr>
+          <a:xfrm>
+            <a:off x="914400" y="1938528"/>
+            <a:ext cx="9418320" cy="877824"/>
+          </a:xfrm>
+          <a:prstGeom prst="rect">
+            <a:avLst/>
+          </a:prstGeom>
+          <a:noFill/>
+          <a:ln/>
+        </p:spPr>
+        <p:txBody>
+          <a:bodyPr wrap="square" lIns="0" tIns="0" rIns="0" bIns="0" rtlCol="0" anchor="ctr"/>
+          <a:lstStyle/>
+          <a:p>
+            <a:pPr indent="0" marL="0">
+              <a:lnSpc>
+                <a:spcPct val="118000"/>
+              </a:lnSpc>
+              <a:buNone/>
+            </a:pPr>
+            <a:r>
+              <a:rPr lang="en-US" sz="1700" dirty="0">
+                <a:solidFill>
+                  <a:srgbClr val="101828"/>
+                </a:solidFill>
+                <a:latin typeface="IBM Plex Sans" pitchFamily="34" charset="0"/>
+                <a:ea typeface="IBM Plex Sans" pitchFamily="34" charset="-122"/>
+                <a:cs typeface="IBM Plex Sans" pitchFamily="34" charset="-120"/>
+              </a:rPr>
+              <a:t>Explain what is meant by multitasking.</a:t>
+            </a:r>
+            <a:endParaRPr lang="en-US" sz="1700" dirty="0"/>
+          </a:p>
+        </p:txBody>
+      </p:sp>
+      <p:sp>
+        <p:nvSpPr>
+          <p:cNvPr id="9" name="Shape 7"/>
+          <p:cNvSpPr/>
+          <p:nvPr/>
+        </p:nvSpPr>
+        <p:spPr>
+          <a:xfrm>
+            <a:off x="10515600" y="2130552"/>
+            <a:ext cx="868680" cy="493776"/>
+          </a:xfrm>
+          <a:prstGeom prst="roundRect">
+            <a:avLst>
+              <a:gd name="adj" fmla="val 18519"/>
+            </a:avLst>
+          </a:prstGeom>
+          <a:solidFill>
+            <a:srgbClr val="EEF2FB"/>
+          </a:solidFill>
+          <a:ln/>
+        </p:spPr>
+      </p:sp>
+      <p:sp>
+        <p:nvSpPr>
+          <p:cNvPr id="10" name="Text 8"/>
+          <p:cNvSpPr txBox="1"/>
+          <p:nvPr/>
+        </p:nvSpPr>
+        <p:spPr>
+          <a:xfrm>
+            <a:off x="10515600" y="2130552"/>
+            <a:ext cx="868680" cy="493776"/>
+          </a:xfrm>
+          <a:prstGeom prst="rect">
+            <a:avLst/>
+          </a:prstGeom>
+          <a:noFill/>
+          <a:ln/>
+        </p:spPr>
+        <p:txBody>
+          <a:bodyPr wrap="square" lIns="0" tIns="0" rIns="0" bIns="0" rtlCol="0" anchor="ctr"/>
+          <a:lstStyle/>
+          <a:p>
+            <a:pPr algn="ctr" indent="0" marL="0">
+              <a:buNone/>
+            </a:pPr>
+            <a:r>
+              <a:rPr lang="en-US" sz="1500" b="1" dirty="0">
+                <a:solidFill>
+                  <a:srgbClr val="2D63FF"/>
+                </a:solidFill>
+                <a:latin typeface="IBM Plex Mono" pitchFamily="34" charset="0"/>
+                <a:ea typeface="IBM Plex Mono" pitchFamily="34" charset="-122"/>
+                <a:cs typeface="IBM Plex Mono" pitchFamily="34" charset="-120"/>
+              </a:rPr>
+              <a:t>[2]</a:t>
+            </a:r>
+            <a:endParaRPr lang="en-US" sz="1500" dirty="0"/>
+          </a:p>
+        </p:txBody>
+      </p:sp>
+      <p:sp>
+        <p:nvSpPr>
+          <p:cNvPr id="11" name="Shape 9"/>
+          <p:cNvSpPr/>
+          <p:nvPr/>
+        </p:nvSpPr>
+        <p:spPr>
+          <a:xfrm>
+            <a:off x="502920" y="3127248"/>
+            <a:ext cx="11155680" cy="1097280"/>
+          </a:xfrm>
+          <a:prstGeom prst="roundRect">
+            <a:avLst>
+              <a:gd name="adj" fmla="val 10000"/>
+            </a:avLst>
+          </a:prstGeom>
+          <a:solidFill>
+            <a:srgbClr val="FFFFFF"/>
+          </a:solidFill>
+          <a:ln w="15875">
+            <a:solidFill>
+              <a:srgbClr val="D9DEE7"/>
+            </a:solidFill>
+            <a:prstDash val="solid"/>
+          </a:ln>
+        </p:spPr>
+      </p:sp>
+      <p:sp>
+        <p:nvSpPr>
+          <p:cNvPr id="12" name="Text 10"/>
+          <p:cNvSpPr txBox="1"/>
+          <p:nvPr/>
+        </p:nvSpPr>
+        <p:spPr>
+          <a:xfrm>
+            <a:off x="914400" y="3236976"/>
+            <a:ext cx="9418320" cy="877824"/>
+          </a:xfrm>
+          <a:prstGeom prst="rect">
+            <a:avLst/>
+          </a:prstGeom>
+          <a:noFill/>
+          <a:ln/>
+        </p:spPr>
+        <p:txBody>
+          <a:bodyPr wrap="square" lIns="0" tIns="0" rIns="0" bIns="0" rtlCol="0" anchor="ctr"/>
+          <a:lstStyle/>
+          <a:p>
+            <a:pPr indent="0" marL="0">
+              <a:lnSpc>
+                <a:spcPct val="118000"/>
+              </a:lnSpc>
+              <a:buNone/>
+            </a:pPr>
+            <a:r>
+              <a:rPr lang="en-US" sz="1700" dirty="0">
+                <a:solidFill>
+                  <a:srgbClr val="101828"/>
+                </a:solidFill>
+                <a:latin typeface="IBM Plex Sans" pitchFamily="34" charset="0"/>
+                <a:ea typeface="IBM Plex Sans" pitchFamily="34" charset="-122"/>
+                <a:cs typeface="IBM Plex Sans" pitchFamily="34" charset="-120"/>
+              </a:rPr>
+              <a:t>Describe how an operating system manages memory when RAM is full.</a:t>
+            </a:r>
+            <a:endParaRPr lang="en-US" sz="1700" dirty="0"/>
+          </a:p>
+        </p:txBody>
+      </p:sp>
+      <p:sp>
+        <p:nvSpPr>
+          <p:cNvPr id="13" name="Shape 11"/>
+          <p:cNvSpPr/>
+          <p:nvPr/>
+        </p:nvSpPr>
+        <p:spPr>
+          <a:xfrm>
+            <a:off x="10515600" y="3429000"/>
+            <a:ext cx="868680" cy="493776"/>
+          </a:xfrm>
+          <a:prstGeom prst="roundRect">
+            <a:avLst>
+              <a:gd name="adj" fmla="val 18519"/>
+            </a:avLst>
+          </a:prstGeom>
+          <a:solidFill>
+            <a:srgbClr val="EEF2FB"/>
+          </a:solidFill>
+          <a:ln/>
+        </p:spPr>
+      </p:sp>
+      <p:sp>
+        <p:nvSpPr>
+          <p:cNvPr id="14" name="Text 12"/>
+          <p:cNvSpPr txBox="1"/>
+          <p:nvPr/>
+        </p:nvSpPr>
+        <p:spPr>
+          <a:xfrm>
+            <a:off x="10515600" y="3429000"/>
+            <a:ext cx="868680" cy="493776"/>
+          </a:xfrm>
+          <a:prstGeom prst="rect">
+            <a:avLst/>
+          </a:prstGeom>
+          <a:noFill/>
+          <a:ln/>
+        </p:spPr>
+        <p:txBody>
+          <a:bodyPr wrap="square" lIns="0" tIns="0" rIns="0" bIns="0" rtlCol="0" anchor="ctr"/>
+          <a:lstStyle/>
+          <a:p>
+            <a:pPr algn="ctr" indent="0" marL="0">
+              <a:buNone/>
+            </a:pPr>
+            <a:r>
+              <a:rPr lang="en-US" sz="1500" b="1" dirty="0">
+                <a:solidFill>
+                  <a:srgbClr val="2D63FF"/>
+                </a:solidFill>
+                <a:latin typeface="IBM Plex Mono" pitchFamily="34" charset="0"/>
+                <a:ea typeface="IBM Plex Mono" pitchFamily="34" charset="-122"/>
+                <a:cs typeface="IBM Plex Mono" pitchFamily="34" charset="-120"/>
+              </a:rPr>
+              <a:t>[4]</a:t>
+            </a:r>
+            <a:endParaRPr lang="en-US" sz="1500" dirty="0"/>
+          </a:p>
+        </p:txBody>
+      </p:sp>
+      <p:sp>
+        <p:nvSpPr>
+          <p:cNvPr id="15" name="Shape 13"/>
+          <p:cNvSpPr/>
+          <p:nvPr/>
+        </p:nvSpPr>
+        <p:spPr>
+          <a:xfrm>
+            <a:off x="502920" y="4425696"/>
+            <a:ext cx="11155680" cy="1097280"/>
+          </a:xfrm>
+          <a:prstGeom prst="roundRect">
+            <a:avLst>
+              <a:gd name="adj" fmla="val 10000"/>
+            </a:avLst>
+          </a:prstGeom>
+          <a:solidFill>
+            <a:srgbClr val="FFFFFF"/>
+          </a:solidFill>
+          <a:ln w="15875">
+            <a:solidFill>
+              <a:srgbClr val="D9DEE7"/>
+            </a:solidFill>
+            <a:prstDash val="solid"/>
+          </a:ln>
+        </p:spPr>
+      </p:sp>
+      <p:sp>
+        <p:nvSpPr>
+          <p:cNvPr id="16" name="Text 14"/>
+          <p:cNvSpPr txBox="1"/>
+          <p:nvPr/>
+        </p:nvSpPr>
+        <p:spPr>
+          <a:xfrm>
+            <a:off x="914400" y="4535424"/>
+            <a:ext cx="9418320" cy="877824"/>
+          </a:xfrm>
+          <a:prstGeom prst="rect">
+            <a:avLst/>
+          </a:prstGeom>
+          <a:noFill/>
+          <a:ln/>
+        </p:spPr>
+        <p:txBody>
+          <a:bodyPr wrap="square" lIns="0" tIns="0" rIns="0" bIns="0" rtlCol="0" anchor="ctr"/>
+          <a:lstStyle/>
+          <a:p>
+            <a:pPr indent="0" marL="0">
+              <a:lnSpc>
+                <a:spcPct val="118000"/>
+              </a:lnSpc>
+              <a:buNone/>
+            </a:pPr>
+            <a:r>
+              <a:rPr lang="en-US" sz="1700" dirty="0">
+                <a:solidFill>
+                  <a:srgbClr val="101828"/>
+                </a:solidFill>
+                <a:latin typeface="IBM Plex Sans" pitchFamily="34" charset="0"/>
+                <a:ea typeface="IBM Plex Sans" pitchFamily="34" charset="-122"/>
+                <a:cs typeface="IBM Plex Sans" pitchFamily="34" charset="-120"/>
+              </a:rPr>
+              <a:t>Explain why a computer needs device drivers.</a:t>
+            </a:r>
+            <a:endParaRPr lang="en-US" sz="1700" dirty="0"/>
+          </a:p>
+        </p:txBody>
+      </p:sp>
+      <p:sp>
+        <p:nvSpPr>
+          <p:cNvPr id="17" name="Shape 15"/>
+          <p:cNvSpPr/>
+          <p:nvPr/>
+        </p:nvSpPr>
+        <p:spPr>
+          <a:xfrm>
+            <a:off x="10515600" y="4727448"/>
+            <a:ext cx="868680" cy="493776"/>
+          </a:xfrm>
+          <a:prstGeom prst="roundRect">
+            <a:avLst>
+              <a:gd name="adj" fmla="val 18519"/>
+            </a:avLst>
+          </a:prstGeom>
+          <a:solidFill>
+            <a:srgbClr val="EEF2FB"/>
+          </a:solidFill>
+          <a:ln/>
+        </p:spPr>
+      </p:sp>
+      <p:sp>
+        <p:nvSpPr>
+          <p:cNvPr id="18" name="Text 16"/>
+          <p:cNvSpPr txBox="1"/>
+          <p:nvPr/>
+        </p:nvSpPr>
+        <p:spPr>
+          <a:xfrm>
+            <a:off x="10515600" y="4727448"/>
+            <a:ext cx="868680" cy="493776"/>
+          </a:xfrm>
+          <a:prstGeom prst="rect">
+            <a:avLst/>
+          </a:prstGeom>
+          <a:noFill/>
+          <a:ln/>
+        </p:spPr>
+        <p:txBody>
+          <a:bodyPr wrap="square" lIns="0" tIns="0" rIns="0" bIns="0" rtlCol="0" anchor="ctr"/>
+          <a:lstStyle/>
+          <a:p>
+            <a:pPr algn="ctr" indent="0" marL="0">
+              <a:buNone/>
+            </a:pPr>
+            <a:r>
+              <a:rPr lang="en-US" sz="1500" b="1" dirty="0">
+                <a:solidFill>
+                  <a:srgbClr val="2D63FF"/>
+                </a:solidFill>
+                <a:latin typeface="IBM Plex Mono" pitchFamily="34" charset="0"/>
+                <a:ea typeface="IBM Plex Mono" pitchFamily="34" charset="-122"/>
+                <a:cs typeface="IBM Plex Mono" pitchFamily="34" charset="-120"/>
+              </a:rPr>
+              <a:t>[3]</a:t>
+            </a:r>
+            <a:endParaRPr lang="en-US" sz="1500" dirty="0"/>
+          </a:p>
+        </p:txBody>
+      </p:sp>
+    </p:spTree>
+  </p:cSld>
+  <p:clrMapOvr>
+    <a:masterClrMapping/>
+  </p:clrMapOvr>
+</p:sld>
+</file>
+
+<file path=ppt/slides/slide15.xml><?xml version="1.0" encoding="utf-8"?>
+<p:sld xmlns:a="http://schemas.openxmlformats.org/drawingml/2006/main" xmlns:r="http://schemas.openxmlformats.org/officeDocument/2006/relationships" xmlns:p="http://schemas.openxmlformats.org/presentationml/2006/main">
+  <p:cSld name="Slide 15">
     <p:bg>
       <p:bgPr>
         <a:solidFill>
